--- a/presentation/PANW_GCS_RealizedARR_FinalDeck.pptx
+++ b/presentation/PANW_GCS_RealizedARR_FinalDeck.pptx
@@ -5,7 +5,7 @@
     <p:sldMasterId id="2147483648" r:id="rId1"/>
   </p:sldMasterIdLst>
   <p:notesMasterIdLst>
-    <p:notesMasterId r:id="rId13"/>
+    <p:notesMasterId r:id="rId17"/>
   </p:notesMasterIdLst>
   <p:sldIdLst>
     <p:sldId id="256" r:id="rId2"/>
@@ -18,7 +18,11 @@
     <p:sldId id="263" r:id="rId9"/>
     <p:sldId id="265" r:id="rId10"/>
     <p:sldId id="266" r:id="rId11"/>
-    <p:sldId id="264" r:id="rId12"/>
+    <p:sldId id="268" r:id="rId12"/>
+    <p:sldId id="264" r:id="rId13"/>
+    <p:sldId id="269" r:id="rId14"/>
+    <p:sldId id="270" r:id="rId15"/>
+    <p:sldId id="271" r:id="rId16"/>
   </p:sldIdLst>
   <p:sldSz cx="9144000" cy="5143500" type="screen16x9"/>
   <p:notesSz cx="5143500" cy="9144000"/>
@@ -115,6 +119,33 @@
     </a:lvl9pPr>
   </p:defaultTextStyle>
   <p:extLst>
+    <p:ext uri="{521415D9-36F7-43E2-AB2F-B90AF26B5E84}">
+      <p14:sectionLst xmlns:p14="http://schemas.microsoft.com/office/powerpoint/2010/main">
+        <p14:section name="Default Section" id="{7CE1461E-E918-EE4A-BFCF-56C792253661}">
+          <p14:sldIdLst>
+            <p14:sldId id="256"/>
+            <p14:sldId id="257"/>
+            <p14:sldId id="258"/>
+            <p14:sldId id="259"/>
+            <p14:sldId id="260"/>
+            <p14:sldId id="261"/>
+            <p14:sldId id="267"/>
+            <p14:sldId id="263"/>
+            <p14:sldId id="265"/>
+            <p14:sldId id="266"/>
+            <p14:sldId id="268"/>
+          </p14:sldIdLst>
+        </p14:section>
+        <p14:section name="Addtional Slide" id="{4CC1D3C0-CC93-2C49-B682-C4A15E483094}">
+          <p14:sldIdLst>
+            <p14:sldId id="264"/>
+            <p14:sldId id="269"/>
+            <p14:sldId id="270"/>
+            <p14:sldId id="271"/>
+          </p14:sldIdLst>
+        </p14:section>
+      </p14:sectionLst>
+    </p:ext>
     <p:ext uri="{EFAFB233-063F-42B5-8137-9DF3F51BA10A}">
       <p15:sldGuideLst xmlns:p15="http://schemas.microsoft.com/office/powerpoint/2012/main"/>
     </p:ext>
@@ -293,7 +324,45 @@
           <a:p>
             <a:r>
               <a:rPr lang="en-US" dirty="0"/>
-              <a:t>Open strong: 'I treated this as a post-sales decision system, not just a metric or dashboard.' Establish the $81M per-point anchor immediately — this is the most important credibility signal. Mention 8 years at Microsoft building post-sales analytics products before explaining the framework.</a:t>
+              <a:t>Talking points to touch during the slide</a:t>
+            </a:r>
+          </a:p>
+          <a:p>
+            <a:pPr marL="171450" indent="-171450">
+              <a:buFontTx/>
+              <a:buChar char="-"/>
+            </a:pPr>
+            <a:r>
+              <a:rPr lang="en-US" dirty="0"/>
+              <a:t>What are these </a:t>
+            </a:r>
+            <a:r>
+              <a:rPr lang="en-US" dirty="0" err="1"/>
+              <a:t>nos</a:t>
+            </a:r>
+            <a:r>
+              <a:rPr lang="en-US" dirty="0"/>
+              <a:t>?</a:t>
+            </a:r>
+          </a:p>
+          <a:p>
+            <a:pPr marL="171450" indent="-171450">
+              <a:buFontTx/>
+              <a:buChar char="-"/>
+            </a:pPr>
+            <a:r>
+              <a:rPr lang="en-US" dirty="0"/>
+              <a:t>How they come into picture?</a:t>
+            </a:r>
+          </a:p>
+          <a:p>
+            <a:pPr marL="171450" indent="-171450">
+              <a:buFontTx/>
+              <a:buChar char="-"/>
+            </a:pPr>
+            <a:r>
+              <a:rPr lang="en-US" dirty="0"/>
+              <a:t>1000 vs Real world scale</a:t>
             </a:r>
           </a:p>
         </p:txBody>
@@ -378,9 +447,56 @@
           <a:bodyPr/>
           <a:lstStyle/>
           <a:p>
+            <a:pPr marL="0" marR="0" lvl="0" indent="0" algn="l" defTabSz="914400" rtl="0" eaLnBrk="1" fontAlgn="auto" latinLnBrk="0" hangingPunct="1">
+              <a:lnSpc>
+                <a:spcPct val="100000"/>
+              </a:lnSpc>
+              <a:spcBef>
+                <a:spcPts val="0"/>
+              </a:spcBef>
+              <a:spcAft>
+                <a:spcPts val="0"/>
+              </a:spcAft>
+              <a:buClrTx/>
+              <a:buSzTx/>
+              <a:buFontTx/>
+              <a:buNone/>
+              <a:tabLst/>
+              <a:defRPr/>
+            </a:pPr>
             <a:r>
               <a:rPr lang="en-US" dirty="0"/>
-              <a:t>Close with the core message stated plainly: 'I treated this as a post-sales decision system, not just a metric or dashboard.' Pause. Let it land. Then: 'The goal is to help GCS identify where customer value is being realized, where ARR is at risk, and where CS, Support, PS, and GTM teams should act.' End with the links — the panel should be able to click through to the live dashboard from their devices during Q&amp;A.</a:t>
+              <a:t>Talking points to touch during the slide</a:t>
+            </a:r>
+          </a:p>
+          <a:p>
+            <a:pPr marL="171450" indent="-171450">
+              <a:buFontTx/>
+              <a:buChar char="-"/>
+            </a:pPr>
+            <a:r>
+              <a:rPr lang="en-US" dirty="0"/>
+              <a:t>End to end roadmap </a:t>
+            </a:r>
+          </a:p>
+          <a:p>
+            <a:pPr marL="171450" indent="-171450">
+              <a:buFontTx/>
+              <a:buChar char="-"/>
+            </a:pPr>
+            <a:r>
+              <a:rPr lang="en-US" dirty="0"/>
+              <a:t>Why not considered compensation </a:t>
+            </a:r>
+          </a:p>
+          <a:p>
+            <a:pPr marL="171450" indent="-171450">
+              <a:buFontTx/>
+              <a:buChar char="-"/>
+            </a:pPr>
+            <a:r>
+              <a:rPr lang="en-US" dirty="0"/>
+              <a:t>How can I help ?</a:t>
             </a:r>
           </a:p>
         </p:txBody>
@@ -426,6 +542,168 @@
   <p:cSld>
     <p:spTree>
       <p:nvGrpSpPr>
+        <p:cNvPr id="1" name="">
+          <a:extLst>
+            <a:ext uri="{FF2B5EF4-FFF2-40B4-BE49-F238E27FC236}">
+              <a16:creationId xmlns:a16="http://schemas.microsoft.com/office/drawing/2014/main" id="{08E8F228-BED4-916A-5D42-43F490C4BE40}"/>
+            </a:ext>
+          </a:extLst>
+        </p:cNvPr>
+        <p:cNvGrpSpPr/>
+        <p:nvPr/>
+      </p:nvGrpSpPr>
+      <p:grpSpPr>
+        <a:xfrm>
+          <a:off x="0" y="0"/>
+          <a:ext cx="0" cy="0"/>
+          <a:chOff x="0" y="0"/>
+          <a:chExt cx="0" cy="0"/>
+        </a:xfrm>
+      </p:grpSpPr>
+      <p:sp>
+        <p:nvSpPr>
+          <p:cNvPr id="2" name="Slide Image Placeholder 1">
+            <a:extLst>
+              <a:ext uri="{FF2B5EF4-FFF2-40B4-BE49-F238E27FC236}">
+                <a16:creationId xmlns:a16="http://schemas.microsoft.com/office/drawing/2014/main" id="{1CF46B0A-60B6-D7AC-6713-0CB29DEA581E}"/>
+              </a:ext>
+            </a:extLst>
+          </p:cNvPr>
+          <p:cNvSpPr>
+            <a:spLocks noGrp="1" noRot="1" noChangeAspect="1"/>
+          </p:cNvSpPr>
+          <p:nvPr>
+            <p:ph type="sldImg"/>
+          </p:nvPr>
+        </p:nvSpPr>
+        <p:spPr/>
+      </p:sp>
+      <p:sp>
+        <p:nvSpPr>
+          <p:cNvPr id="3" name="Notes Placeholder 2">
+            <a:extLst>
+              <a:ext uri="{FF2B5EF4-FFF2-40B4-BE49-F238E27FC236}">
+                <a16:creationId xmlns:a16="http://schemas.microsoft.com/office/drawing/2014/main" id="{80D07AFE-FFB0-94B6-97CA-2FBCF1E54B87}"/>
+              </a:ext>
+            </a:extLst>
+          </p:cNvPr>
+          <p:cNvSpPr>
+            <a:spLocks noGrp="1"/>
+          </p:cNvSpPr>
+          <p:nvPr>
+            <p:ph type="body" idx="1"/>
+          </p:nvPr>
+        </p:nvSpPr>
+        <p:spPr/>
+        <p:txBody>
+          <a:bodyPr/>
+          <a:lstStyle/>
+          <a:p>
+            <a:pPr marL="0" marR="0" lvl="0" indent="0" algn="l" defTabSz="914400" rtl="0" eaLnBrk="1" fontAlgn="auto" latinLnBrk="0" hangingPunct="1">
+              <a:lnSpc>
+                <a:spcPct val="100000"/>
+              </a:lnSpc>
+              <a:spcBef>
+                <a:spcPts val="0"/>
+              </a:spcBef>
+              <a:spcAft>
+                <a:spcPts val="0"/>
+              </a:spcAft>
+              <a:buClrTx/>
+              <a:buSzTx/>
+              <a:buFontTx/>
+              <a:buNone/>
+              <a:tabLst/>
+              <a:defRPr/>
+            </a:pPr>
+            <a:r>
+              <a:rPr lang="en-US" dirty="0"/>
+              <a:t>Talking points to touch during the slide</a:t>
+            </a:r>
+          </a:p>
+          <a:p>
+            <a:r>
+              <a:rPr lang="en-US" dirty="0"/>
+              <a:t>- If they do not have questions double click on things which came up in presentation</a:t>
+            </a:r>
+          </a:p>
+          <a:p>
+            <a:pPr marL="171450" indent="-171450">
+              <a:buFontTx/>
+              <a:buChar char="-"/>
+            </a:pPr>
+            <a:r>
+              <a:rPr lang="en-US" dirty="0"/>
+              <a:t>Show case </a:t>
+            </a:r>
+            <a:r>
+              <a:rPr lang="en-US" dirty="0" err="1"/>
+              <a:t>github</a:t>
+            </a:r>
+            <a:r>
+              <a:rPr lang="en-US" dirty="0"/>
+              <a:t> and docs </a:t>
+            </a:r>
+          </a:p>
+          <a:p>
+            <a:pPr marL="171450" indent="-171450">
+              <a:buFontTx/>
+              <a:buChar char="-"/>
+            </a:pPr>
+            <a:r>
+              <a:rPr lang="en-US" dirty="0"/>
+              <a:t>Go more into dashboard if required, showcase minute features u added</a:t>
+            </a:r>
+          </a:p>
+        </p:txBody>
+      </p:sp>
+      <p:sp>
+        <p:nvSpPr>
+          <p:cNvPr id="4" name="Slide Number Placeholder 3">
+            <a:extLst>
+              <a:ext uri="{FF2B5EF4-FFF2-40B4-BE49-F238E27FC236}">
+                <a16:creationId xmlns:a16="http://schemas.microsoft.com/office/drawing/2014/main" id="{60B0D125-1A02-C580-EBBF-7F685BC4C3BE}"/>
+              </a:ext>
+            </a:extLst>
+          </p:cNvPr>
+          <p:cNvSpPr>
+            <a:spLocks noGrp="1"/>
+          </p:cNvSpPr>
+          <p:nvPr>
+            <p:ph type="sldNum" sz="quarter" idx="10"/>
+          </p:nvPr>
+        </p:nvSpPr>
+        <p:spPr/>
+        <p:txBody>
+          <a:bodyPr/>
+          <a:lstStyle/>
+          <a:p>
+            <a:fld id="{F7021451-1387-4CA6-816F-3879F97B5CBC}" type="slidenum">
+              <a:rPr lang="en-US"/>
+              <a:t>11</a:t>
+            </a:fld>
+            <a:endParaRPr lang="en-US"/>
+          </a:p>
+        </p:txBody>
+      </p:sp>
+    </p:spTree>
+    <p:extLst>
+      <p:ext uri="{BB962C8B-B14F-4D97-AF65-F5344CB8AC3E}">
+        <p14:creationId xmlns:p14="http://schemas.microsoft.com/office/powerpoint/2010/main" val="339329305"/>
+      </p:ext>
+    </p:extLst>
+  </p:cSld>
+  <p:clrMapOvr>
+    <a:masterClrMapping/>
+  </p:clrMapOvr>
+</p:notes>
+</file>
+
+<file path=ppt/notesSlides/notesSlide12.xml><?xml version="1.0" encoding="utf-8"?>
+<p:notes xmlns:a="http://schemas.openxmlformats.org/drawingml/2006/main" xmlns:r="http://schemas.openxmlformats.org/officeDocument/2006/relationships" xmlns:p="http://schemas.openxmlformats.org/presentationml/2006/main">
+  <p:cSld>
+    <p:spTree>
+      <p:nvGrpSpPr>
         <p:cNvPr id="1" name=""/>
         <p:cNvGrpSpPr/>
         <p:nvPr/>
@@ -465,19 +743,62 @@
           <a:bodyPr/>
           <a:lstStyle/>
           <a:p>
+            <a:pPr marL="0" marR="0" lvl="0" indent="0" algn="l" defTabSz="914400" rtl="0" eaLnBrk="1" fontAlgn="auto" latinLnBrk="0" hangingPunct="1">
+              <a:lnSpc>
+                <a:spcPct val="100000"/>
+              </a:lnSpc>
+              <a:spcBef>
+                <a:spcPts val="0"/>
+              </a:spcBef>
+              <a:spcAft>
+                <a:spcPts val="0"/>
+              </a:spcAft>
+              <a:buClrTx/>
+              <a:buSzTx/>
+              <a:buFontTx/>
+              <a:buNone/>
+              <a:tabLst/>
+              <a:defRPr/>
+            </a:pPr>
             <a:r>
               <a:rPr lang="en-US" dirty="0"/>
-              <a:t>I’m not recommending this comp model today. I included it to show how the metric could eventually inform GTM behavior after shadow validation</a:t>
-            </a:r>
-          </a:p>
-          <a:p>
+              <a:t>Talking points to touch during the slide</a:t>
+            </a:r>
+          </a:p>
+          <a:p>
+            <a:pPr marL="171450" indent="-171450">
+              <a:buFontTx/>
+              <a:buChar char="-"/>
+            </a:pPr>
+            <a:r>
+              <a:rPr lang="en-US" dirty="0"/>
+              <a:t>Bring up only compensation is insisted </a:t>
+            </a:r>
+          </a:p>
+          <a:p>
+            <a:pPr marL="171450" indent="-171450">
+              <a:buFontTx/>
+              <a:buChar char="-"/>
+            </a:pPr>
+            <a:r>
+              <a:rPr lang="en-US" dirty="0"/>
+              <a:t>This is not the driver its long vision – needs bigger financial evaluation </a:t>
+            </a:r>
+          </a:p>
+          <a:p>
+            <a:pPr marL="171450" indent="-171450">
+              <a:buFontTx/>
+              <a:buChar char="-"/>
+            </a:pPr>
+            <a:r>
+              <a:rPr lang="en-US" dirty="0"/>
+              <a:t>Behavior over revenue , customer value over business </a:t>
+            </a:r>
+            <a:r>
+              <a:rPr lang="en-US"/>
+              <a:t>operations ease </a:t>
+            </a:r>
             <a:endParaRPr lang="en-US" dirty="0"/>
-          </a:p>
-          <a:p>
-            <a:r>
-              <a:rPr lang="en-US" dirty="0"/>
-              <a:t>Critical talking point for the CS VP: 'Realized ARR is not a weapon to punish reps — it is a compass to guide them to expansion.' The compensation model was validated by external CS leaders who explicitly said hard expansion quotas cause lead hoarding. For the SC: the overage flag turns a billing risk into an upsell conversation — overagers are your best expansion pipeline. 'If everything is tied to a dollar value, people will own it.' — CS Leaders Roundtable, June 2025.</a:t>
-            </a:r>
           </a:p>
         </p:txBody>
       </p:sp>
@@ -498,7 +819,7 @@
           <a:p>
             <a:fld id="{F7021451-1387-4CA6-816F-3879F97B5CBC}" type="slidenum">
               <a:rPr lang="en-US"/>
-              <a:t>11</a:t>
+              <a:t>12</a:t>
             </a:fld>
             <a:endParaRPr lang="en-US"/>
           </a:p>
@@ -508,6 +829,330 @@
     <p:extLst>
       <p:ext uri="{BB962C8B-B14F-4D97-AF65-F5344CB8AC3E}">
         <p14:creationId xmlns:p14="http://schemas.microsoft.com/office/powerpoint/2010/main" val="1024086991"/>
+      </p:ext>
+    </p:extLst>
+  </p:cSld>
+  <p:clrMapOvr>
+    <a:masterClrMapping/>
+  </p:clrMapOvr>
+</p:notes>
+</file>
+
+<file path=ppt/notesSlides/notesSlide13.xml><?xml version="1.0" encoding="utf-8"?>
+<p:notes xmlns:a="http://schemas.openxmlformats.org/drawingml/2006/main" xmlns:r="http://schemas.openxmlformats.org/officeDocument/2006/relationships" xmlns:p="http://schemas.openxmlformats.org/presentationml/2006/main">
+  <p:cSld>
+    <p:spTree>
+      <p:nvGrpSpPr>
+        <p:cNvPr id="1" name="">
+          <a:extLst>
+            <a:ext uri="{FF2B5EF4-FFF2-40B4-BE49-F238E27FC236}">
+              <a16:creationId xmlns:a16="http://schemas.microsoft.com/office/drawing/2014/main" id="{D1CE3D6D-02A1-9E41-31C3-7F4FCE7418D9}"/>
+            </a:ext>
+          </a:extLst>
+        </p:cNvPr>
+        <p:cNvGrpSpPr/>
+        <p:nvPr/>
+      </p:nvGrpSpPr>
+      <p:grpSpPr>
+        <a:xfrm>
+          <a:off x="0" y="0"/>
+          <a:ext cx="0" cy="0"/>
+          <a:chOff x="0" y="0"/>
+          <a:chExt cx="0" cy="0"/>
+        </a:xfrm>
+      </p:grpSpPr>
+      <p:sp>
+        <p:nvSpPr>
+          <p:cNvPr id="2" name="Slide Image Placeholder 1">
+            <a:extLst>
+              <a:ext uri="{FF2B5EF4-FFF2-40B4-BE49-F238E27FC236}">
+                <a16:creationId xmlns:a16="http://schemas.microsoft.com/office/drawing/2014/main" id="{24403EE1-B880-3CE5-74A3-84F47C929A6C}"/>
+              </a:ext>
+            </a:extLst>
+          </p:cNvPr>
+          <p:cNvSpPr>
+            <a:spLocks noGrp="1" noRot="1" noChangeAspect="1"/>
+          </p:cNvSpPr>
+          <p:nvPr>
+            <p:ph type="sldImg"/>
+          </p:nvPr>
+        </p:nvSpPr>
+        <p:spPr/>
+      </p:sp>
+      <p:sp>
+        <p:nvSpPr>
+          <p:cNvPr id="3" name="Notes Placeholder 2">
+            <a:extLst>
+              <a:ext uri="{FF2B5EF4-FFF2-40B4-BE49-F238E27FC236}">
+                <a16:creationId xmlns:a16="http://schemas.microsoft.com/office/drawing/2014/main" id="{41F059AF-0DAA-93AB-848A-9E43A10A8226}"/>
+              </a:ext>
+            </a:extLst>
+          </p:cNvPr>
+          <p:cNvSpPr>
+            <a:spLocks noGrp="1"/>
+          </p:cNvSpPr>
+          <p:nvPr>
+            <p:ph type="body" idx="1"/>
+          </p:nvPr>
+        </p:nvSpPr>
+        <p:spPr/>
+        <p:txBody>
+          <a:bodyPr/>
+          <a:lstStyle/>
+          <a:p>
+            <a:endParaRPr lang="en-US" dirty="0"/>
+          </a:p>
+        </p:txBody>
+      </p:sp>
+      <p:sp>
+        <p:nvSpPr>
+          <p:cNvPr id="4" name="Slide Number Placeholder 3">
+            <a:extLst>
+              <a:ext uri="{FF2B5EF4-FFF2-40B4-BE49-F238E27FC236}">
+                <a16:creationId xmlns:a16="http://schemas.microsoft.com/office/drawing/2014/main" id="{6BB56549-0B1C-DCF0-A252-EE4425326D2A}"/>
+              </a:ext>
+            </a:extLst>
+          </p:cNvPr>
+          <p:cNvSpPr>
+            <a:spLocks noGrp="1"/>
+          </p:cNvSpPr>
+          <p:nvPr>
+            <p:ph type="sldNum" sz="quarter" idx="10"/>
+          </p:nvPr>
+        </p:nvSpPr>
+        <p:spPr/>
+        <p:txBody>
+          <a:bodyPr/>
+          <a:lstStyle/>
+          <a:p>
+            <a:fld id="{F7021451-1387-4CA6-816F-3879F97B5CBC}" type="slidenum">
+              <a:rPr lang="en-US"/>
+              <a:t>13</a:t>
+            </a:fld>
+            <a:endParaRPr lang="en-US"/>
+          </a:p>
+        </p:txBody>
+      </p:sp>
+    </p:spTree>
+    <p:extLst>
+      <p:ext uri="{BB962C8B-B14F-4D97-AF65-F5344CB8AC3E}">
+        <p14:creationId xmlns:p14="http://schemas.microsoft.com/office/powerpoint/2010/main" val="3202892150"/>
+      </p:ext>
+    </p:extLst>
+  </p:cSld>
+  <p:clrMapOvr>
+    <a:masterClrMapping/>
+  </p:clrMapOvr>
+</p:notes>
+</file>
+
+<file path=ppt/notesSlides/notesSlide14.xml><?xml version="1.0" encoding="utf-8"?>
+<p:notes xmlns:a="http://schemas.openxmlformats.org/drawingml/2006/main" xmlns:r="http://schemas.openxmlformats.org/officeDocument/2006/relationships" xmlns:p="http://schemas.openxmlformats.org/presentationml/2006/main">
+  <p:cSld>
+    <p:spTree>
+      <p:nvGrpSpPr>
+        <p:cNvPr id="1" name="">
+          <a:extLst>
+            <a:ext uri="{FF2B5EF4-FFF2-40B4-BE49-F238E27FC236}">
+              <a16:creationId xmlns:a16="http://schemas.microsoft.com/office/drawing/2014/main" id="{F0A6AD61-37E8-4019-1B7C-3E7934F16991}"/>
+            </a:ext>
+          </a:extLst>
+        </p:cNvPr>
+        <p:cNvGrpSpPr/>
+        <p:nvPr/>
+      </p:nvGrpSpPr>
+      <p:grpSpPr>
+        <a:xfrm>
+          <a:off x="0" y="0"/>
+          <a:ext cx="0" cy="0"/>
+          <a:chOff x="0" y="0"/>
+          <a:chExt cx="0" cy="0"/>
+        </a:xfrm>
+      </p:grpSpPr>
+      <p:sp>
+        <p:nvSpPr>
+          <p:cNvPr id="2" name="Slide Image Placeholder 1">
+            <a:extLst>
+              <a:ext uri="{FF2B5EF4-FFF2-40B4-BE49-F238E27FC236}">
+                <a16:creationId xmlns:a16="http://schemas.microsoft.com/office/drawing/2014/main" id="{159F7FDC-14E6-76B0-8421-223C69DD4C78}"/>
+              </a:ext>
+            </a:extLst>
+          </p:cNvPr>
+          <p:cNvSpPr>
+            <a:spLocks noGrp="1" noRot="1" noChangeAspect="1"/>
+          </p:cNvSpPr>
+          <p:nvPr>
+            <p:ph type="sldImg"/>
+          </p:nvPr>
+        </p:nvSpPr>
+        <p:spPr/>
+      </p:sp>
+      <p:sp>
+        <p:nvSpPr>
+          <p:cNvPr id="3" name="Notes Placeholder 2">
+            <a:extLst>
+              <a:ext uri="{FF2B5EF4-FFF2-40B4-BE49-F238E27FC236}">
+                <a16:creationId xmlns:a16="http://schemas.microsoft.com/office/drawing/2014/main" id="{192BC9C5-ED5B-08D6-6B96-41A661FCBEBE}"/>
+              </a:ext>
+            </a:extLst>
+          </p:cNvPr>
+          <p:cNvSpPr>
+            <a:spLocks noGrp="1"/>
+          </p:cNvSpPr>
+          <p:nvPr>
+            <p:ph type="body" idx="1"/>
+          </p:nvPr>
+        </p:nvSpPr>
+        <p:spPr/>
+        <p:txBody>
+          <a:bodyPr/>
+          <a:lstStyle/>
+          <a:p>
+            <a:endParaRPr lang="en-US" dirty="0"/>
+          </a:p>
+        </p:txBody>
+      </p:sp>
+      <p:sp>
+        <p:nvSpPr>
+          <p:cNvPr id="4" name="Slide Number Placeholder 3">
+            <a:extLst>
+              <a:ext uri="{FF2B5EF4-FFF2-40B4-BE49-F238E27FC236}">
+                <a16:creationId xmlns:a16="http://schemas.microsoft.com/office/drawing/2014/main" id="{700A45D7-A05A-DD7E-B0BA-31A07F7A0B2E}"/>
+              </a:ext>
+            </a:extLst>
+          </p:cNvPr>
+          <p:cNvSpPr>
+            <a:spLocks noGrp="1"/>
+          </p:cNvSpPr>
+          <p:nvPr>
+            <p:ph type="sldNum" sz="quarter" idx="10"/>
+          </p:nvPr>
+        </p:nvSpPr>
+        <p:spPr/>
+        <p:txBody>
+          <a:bodyPr/>
+          <a:lstStyle/>
+          <a:p>
+            <a:fld id="{F7021451-1387-4CA6-816F-3879F97B5CBC}" type="slidenum">
+              <a:rPr lang="en-US"/>
+              <a:t>14</a:t>
+            </a:fld>
+            <a:endParaRPr lang="en-US"/>
+          </a:p>
+        </p:txBody>
+      </p:sp>
+    </p:spTree>
+    <p:extLst>
+      <p:ext uri="{BB962C8B-B14F-4D97-AF65-F5344CB8AC3E}">
+        <p14:creationId xmlns:p14="http://schemas.microsoft.com/office/powerpoint/2010/main" val="947612689"/>
+      </p:ext>
+    </p:extLst>
+  </p:cSld>
+  <p:clrMapOvr>
+    <a:masterClrMapping/>
+  </p:clrMapOvr>
+</p:notes>
+</file>
+
+<file path=ppt/notesSlides/notesSlide15.xml><?xml version="1.0" encoding="utf-8"?>
+<p:notes xmlns:a="http://schemas.openxmlformats.org/drawingml/2006/main" xmlns:r="http://schemas.openxmlformats.org/officeDocument/2006/relationships" xmlns:p="http://schemas.openxmlformats.org/presentationml/2006/main">
+  <p:cSld>
+    <p:spTree>
+      <p:nvGrpSpPr>
+        <p:cNvPr id="1" name="">
+          <a:extLst>
+            <a:ext uri="{FF2B5EF4-FFF2-40B4-BE49-F238E27FC236}">
+              <a16:creationId xmlns:a16="http://schemas.microsoft.com/office/drawing/2014/main" id="{4E61D595-4DC9-47A6-B3B6-A4891D637D41}"/>
+            </a:ext>
+          </a:extLst>
+        </p:cNvPr>
+        <p:cNvGrpSpPr/>
+        <p:nvPr/>
+      </p:nvGrpSpPr>
+      <p:grpSpPr>
+        <a:xfrm>
+          <a:off x="0" y="0"/>
+          <a:ext cx="0" cy="0"/>
+          <a:chOff x="0" y="0"/>
+          <a:chExt cx="0" cy="0"/>
+        </a:xfrm>
+      </p:grpSpPr>
+      <p:sp>
+        <p:nvSpPr>
+          <p:cNvPr id="2" name="Slide Image Placeholder 1">
+            <a:extLst>
+              <a:ext uri="{FF2B5EF4-FFF2-40B4-BE49-F238E27FC236}">
+                <a16:creationId xmlns:a16="http://schemas.microsoft.com/office/drawing/2014/main" id="{671315FC-0FF8-4BD4-61E7-9122EF35E12B}"/>
+              </a:ext>
+            </a:extLst>
+          </p:cNvPr>
+          <p:cNvSpPr>
+            <a:spLocks noGrp="1" noRot="1" noChangeAspect="1"/>
+          </p:cNvSpPr>
+          <p:nvPr>
+            <p:ph type="sldImg"/>
+          </p:nvPr>
+        </p:nvSpPr>
+        <p:spPr/>
+      </p:sp>
+      <p:sp>
+        <p:nvSpPr>
+          <p:cNvPr id="3" name="Notes Placeholder 2">
+            <a:extLst>
+              <a:ext uri="{FF2B5EF4-FFF2-40B4-BE49-F238E27FC236}">
+                <a16:creationId xmlns:a16="http://schemas.microsoft.com/office/drawing/2014/main" id="{91EB7663-A29A-82C1-36BC-65FB0136DE13}"/>
+              </a:ext>
+            </a:extLst>
+          </p:cNvPr>
+          <p:cNvSpPr>
+            <a:spLocks noGrp="1"/>
+          </p:cNvSpPr>
+          <p:nvPr>
+            <p:ph type="body" idx="1"/>
+          </p:nvPr>
+        </p:nvSpPr>
+        <p:spPr/>
+        <p:txBody>
+          <a:bodyPr/>
+          <a:lstStyle/>
+          <a:p>
+            <a:endParaRPr lang="en-US" dirty="0"/>
+          </a:p>
+        </p:txBody>
+      </p:sp>
+      <p:sp>
+        <p:nvSpPr>
+          <p:cNvPr id="4" name="Slide Number Placeholder 3">
+            <a:extLst>
+              <a:ext uri="{FF2B5EF4-FFF2-40B4-BE49-F238E27FC236}">
+                <a16:creationId xmlns:a16="http://schemas.microsoft.com/office/drawing/2014/main" id="{C3029122-5FC7-AC1F-B4D6-F503CB3BC7C8}"/>
+              </a:ext>
+            </a:extLst>
+          </p:cNvPr>
+          <p:cNvSpPr>
+            <a:spLocks noGrp="1"/>
+          </p:cNvSpPr>
+          <p:nvPr>
+            <p:ph type="sldNum" sz="quarter" idx="10"/>
+          </p:nvPr>
+        </p:nvSpPr>
+        <p:spPr/>
+        <p:txBody>
+          <a:bodyPr/>
+          <a:lstStyle/>
+          <a:p>
+            <a:fld id="{F7021451-1387-4CA6-816F-3879F97B5CBC}" type="slidenum">
+              <a:rPr lang="en-US"/>
+              <a:t>15</a:t>
+            </a:fld>
+            <a:endParaRPr lang="en-US"/>
+          </a:p>
+        </p:txBody>
+      </p:sp>
+    </p:spTree>
+    <p:extLst>
+      <p:ext uri="{BB962C8B-B14F-4D97-AF65-F5344CB8AC3E}">
+        <p14:creationId xmlns:p14="http://schemas.microsoft.com/office/powerpoint/2010/main" val="3576177315"/>
       </p:ext>
     </p:extLst>
   </p:cSld>
@@ -563,7 +1208,37 @@
           <a:p>
             <a:r>
               <a:rPr lang="en-US" dirty="0"/>
-              <a:t>This slide establishes PM credibility. Key talking point: 'I've built this exact pattern before at Microsoft — the Quality Hub reduced VP reporting from 5 days to 4 hours using the same multi-signal consolidation architecture.' Lead with the philosophy quote — it frames everything that follows.</a:t>
+              <a:t>Talking points to touch during the slide</a:t>
+            </a:r>
+          </a:p>
+          <a:p>
+            <a:pPr marL="171450" indent="-171450">
+              <a:buFontTx/>
+              <a:buChar char="-"/>
+            </a:pPr>
+            <a:r>
+              <a:rPr lang="en-US" dirty="0"/>
+              <a:t>Why reliable is important?</a:t>
+            </a:r>
+          </a:p>
+          <a:p>
+            <a:pPr marL="171450" indent="-171450">
+              <a:buFontTx/>
+              <a:buChar char="-"/>
+            </a:pPr>
+            <a:r>
+              <a:rPr lang="en-US" dirty="0"/>
+              <a:t>Why technical and product plays role in overall design?</a:t>
+            </a:r>
+          </a:p>
+          <a:p>
+            <a:pPr marL="171450" indent="-171450">
+              <a:buFontTx/>
+              <a:buChar char="-"/>
+            </a:pPr>
+            <a:r>
+              <a:rPr lang="en-US" dirty="0"/>
+              <a:t>What exposure in customer space in post sales?</a:t>
             </a:r>
           </a:p>
         </p:txBody>
@@ -648,9 +1323,56 @@
           <a:bodyPr/>
           <a:lstStyle/>
           <a:p>
+            <a:pPr marL="0" marR="0" lvl="0" indent="0" algn="l" defTabSz="914400" rtl="0" eaLnBrk="1" fontAlgn="auto" latinLnBrk="0" hangingPunct="1">
+              <a:lnSpc>
+                <a:spcPct val="100000"/>
+              </a:lnSpc>
+              <a:spcBef>
+                <a:spcPts val="0"/>
+              </a:spcBef>
+              <a:spcAft>
+                <a:spcPts val="0"/>
+              </a:spcAft>
+              <a:buClrTx/>
+              <a:buSzTx/>
+              <a:buFontTx/>
+              <a:buNone/>
+              <a:tabLst/>
+              <a:defRPr/>
+            </a:pPr>
             <a:r>
               <a:rPr lang="en-US" dirty="0"/>
-              <a:t>For the CS VP: frame shelfware as 'toxic ARR' — accounts that close at full TCV but never deploy are inherited by CS without any data. For the Analytics Lead: this is the measurement gap we are closing with a mathematically consistent pipeline. For the SC: data ingestion stalls are the primary friction — a customer who can't deploy is a customer who can't realize security efficacy.</a:t>
+              <a:t>Talking points to touch during the slide</a:t>
+            </a:r>
+          </a:p>
+          <a:p>
+            <a:pPr marL="171450" indent="-171450">
+              <a:buFontTx/>
+              <a:buChar char="-"/>
+            </a:pPr>
+            <a:r>
+              <a:rPr lang="en-US" dirty="0"/>
+              <a:t>Why this problem is real?</a:t>
+            </a:r>
+          </a:p>
+          <a:p>
+            <a:pPr marL="171450" indent="-171450">
+              <a:buFontTx/>
+              <a:buChar char="-"/>
+            </a:pPr>
+            <a:r>
+              <a:rPr lang="en-US" dirty="0"/>
+              <a:t>What is important problem to solve for – my take uncover hidden behavior rest will follow?</a:t>
+            </a:r>
+          </a:p>
+          <a:p>
+            <a:pPr marL="171450" indent="-171450">
+              <a:buFontTx/>
+              <a:buChar char="-"/>
+            </a:pPr>
+            <a:r>
+              <a:rPr lang="en-US" dirty="0"/>
+              <a:t>Are we measuring the right things ?</a:t>
             </a:r>
           </a:p>
         </p:txBody>
@@ -735,9 +1457,56 @@
           <a:bodyPr/>
           <a:lstStyle/>
           <a:p>
+            <a:pPr marL="0" marR="0" lvl="0" indent="0" algn="l" defTabSz="914400" rtl="0" eaLnBrk="1" fontAlgn="auto" latinLnBrk="0" hangingPunct="1">
+              <a:lnSpc>
+                <a:spcPct val="100000"/>
+              </a:lnSpc>
+              <a:spcBef>
+                <a:spcPts val="0"/>
+              </a:spcBef>
+              <a:spcAft>
+                <a:spcPts val="0"/>
+              </a:spcAft>
+              <a:buClrTx/>
+              <a:buSzTx/>
+              <a:buFontTx/>
+              <a:buNone/>
+              <a:tabLst/>
+              <a:defRPr/>
+            </a:pPr>
             <a:r>
               <a:rPr lang="en-US" dirty="0"/>
-              <a:t>This is the technical heart of the presentation. Key talking points: (1) The 40% weight on Deployment is not arbitrary — data ingestion is the engine of security value at PANW. (2) The shelfware hard-floor is the single most important design decision — every other framework allows shelfware to score above zero. (3) The MIN(1.0) cap on Deployment Score means overages don't hide in the composite — they get flagged separately for expansion signal.</a:t>
+              <a:t>Talking points to touch during the slide</a:t>
+            </a:r>
+          </a:p>
+          <a:p>
+            <a:pPr marL="171450" indent="-171450">
+              <a:buFontTx/>
+              <a:buChar char="-"/>
+            </a:pPr>
+            <a:r>
+              <a:rPr lang="en-US" dirty="0"/>
+              <a:t>Why ARR?</a:t>
+            </a:r>
+          </a:p>
+          <a:p>
+            <a:pPr marL="171450" indent="-171450">
+              <a:buFontTx/>
+              <a:buChar char="-"/>
+            </a:pPr>
+            <a:r>
+              <a:rPr lang="en-US" dirty="0"/>
+              <a:t>Why 40/30/20/10 ? – why only these components?</a:t>
+            </a:r>
+          </a:p>
+          <a:p>
+            <a:pPr marL="171450" indent="-171450">
+              <a:buFontTx/>
+              <a:buChar char="-"/>
+            </a:pPr>
+            <a:r>
+              <a:rPr lang="en-US" dirty="0"/>
+              <a:t>Why not compensation?</a:t>
             </a:r>
           </a:p>
         </p:txBody>
@@ -822,9 +1591,64 @@
           <a:bodyPr/>
           <a:lstStyle/>
           <a:p>
+            <a:pPr marL="0" marR="0" lvl="0" indent="0" algn="l" defTabSz="914400" rtl="0" eaLnBrk="1" fontAlgn="auto" latinLnBrk="0" hangingPunct="1">
+              <a:lnSpc>
+                <a:spcPct val="100000"/>
+              </a:lnSpc>
+              <a:spcBef>
+                <a:spcPts val="0"/>
+              </a:spcBef>
+              <a:spcAft>
+                <a:spcPts val="0"/>
+              </a:spcAft>
+              <a:buClrTx/>
+              <a:buSzTx/>
+              <a:buFontTx/>
+              <a:buNone/>
+              <a:tabLst/>
+              <a:defRPr/>
+            </a:pPr>
             <a:r>
               <a:rPr lang="en-US" dirty="0"/>
-              <a:t>Key talking points for the Analytics Lead: 'We did not start coding until 1,449 lines of Markdown specification were reviewed and approved.' Show the GitHub repo here. Walk through the MAX() overlap fix — 'if we blindly sum across overlapping contracts in BigQuery, we double-count ARR and distort every sales quota.' The DQ gate approach is the same architecture I used at Quality Hub at Microsoft.</a:t>
+              <a:t>Talking points to touch during the slide</a:t>
+            </a:r>
+          </a:p>
+          <a:p>
+            <a:pPr marL="171450" indent="-171450">
+              <a:buFontTx/>
+              <a:buChar char="-"/>
+            </a:pPr>
+            <a:r>
+              <a:rPr lang="en-US" dirty="0"/>
+              <a:t>Why only use these technical arch why not something else?</a:t>
+            </a:r>
+          </a:p>
+          <a:p>
+            <a:pPr marL="171450" indent="-171450">
+              <a:buFontTx/>
+              <a:buChar char="-"/>
+            </a:pPr>
+            <a:r>
+              <a:rPr lang="en-US" dirty="0"/>
+              <a:t>Why only 22 test, how did u </a:t>
+            </a:r>
+            <a:r>
+              <a:rPr lang="en-US" dirty="0" err="1"/>
+              <a:t>priotize</a:t>
+            </a:r>
+            <a:r>
+              <a:rPr lang="en-US" dirty="0"/>
+              <a:t>?</a:t>
+            </a:r>
+          </a:p>
+          <a:p>
+            <a:pPr marL="171450" indent="-171450">
+              <a:buFontTx/>
+              <a:buChar char="-"/>
+            </a:pPr>
+            <a:r>
+              <a:rPr lang="en-US" dirty="0"/>
+              <a:t>Why only 5 anomalies?</a:t>
             </a:r>
           </a:p>
         </p:txBody>
@@ -909,9 +1733,56 @@
           <a:bodyPr/>
           <a:lstStyle/>
           <a:p>
+            <a:pPr marL="0" marR="0" lvl="0" indent="0" algn="l" defTabSz="914400" rtl="0" eaLnBrk="1" fontAlgn="auto" latinLnBrk="0" hangingPunct="1">
+              <a:lnSpc>
+                <a:spcPct val="100000"/>
+              </a:lnSpc>
+              <a:spcBef>
+                <a:spcPts val="0"/>
+              </a:spcBef>
+              <a:spcAft>
+                <a:spcPts val="0"/>
+              </a:spcAft>
+              <a:buClrTx/>
+              <a:buSzTx/>
+              <a:buFontTx/>
+              <a:buNone/>
+              <a:tabLst/>
+              <a:defRPr/>
+            </a:pPr>
             <a:r>
               <a:rPr lang="en-US" dirty="0"/>
-              <a:t>This is your 'vibe coding' showcase slide. Do NOT show a wall of SQL. Frame each case through the lens of 'what goes wrong if we don't handle this.' The shelfware case: 'an un-deployed product means an unprotected attack surface — I built a hard floor that drops the entire score to zero. No partial credit.' The expansion case: 'This turns a billing risk into a pipeline generation tool for the field.'</a:t>
+              <a:t>Talking points to touch during the slide</a:t>
+            </a:r>
+          </a:p>
+          <a:p>
+            <a:pPr marL="171450" indent="-171450">
+              <a:buFontTx/>
+              <a:buChar char="-"/>
+            </a:pPr>
+            <a:r>
+              <a:rPr lang="en-US" dirty="0"/>
+              <a:t>Why these are important?</a:t>
+            </a:r>
+          </a:p>
+          <a:p>
+            <a:pPr marL="171450" indent="-171450">
+              <a:buFontTx/>
+              <a:buChar char="-"/>
+            </a:pPr>
+            <a:r>
+              <a:rPr lang="en-US" dirty="0"/>
+              <a:t>How post sales drives these?</a:t>
+            </a:r>
+          </a:p>
+          <a:p>
+            <a:pPr marL="171450" indent="-171450">
+              <a:buFontTx/>
+              <a:buChar char="-"/>
+            </a:pPr>
+            <a:r>
+              <a:rPr lang="en-US" dirty="0"/>
+              <a:t>What is there for post sales team?</a:t>
             </a:r>
           </a:p>
         </p:txBody>
@@ -1014,10 +1885,72 @@
           <a:bodyPr/>
           <a:lstStyle/>
           <a:p>
+            <a:pPr marL="0" marR="0" lvl="0" indent="0" algn="l" defTabSz="914400" rtl="0" eaLnBrk="1" fontAlgn="auto" latinLnBrk="0" hangingPunct="1">
+              <a:lnSpc>
+                <a:spcPct val="100000"/>
+              </a:lnSpc>
+              <a:spcBef>
+                <a:spcPts val="0"/>
+              </a:spcBef>
+              <a:spcAft>
+                <a:spcPts val="0"/>
+              </a:spcAft>
+              <a:buClrTx/>
+              <a:buSzTx/>
+              <a:buFontTx/>
+              <a:buNone/>
+              <a:tabLst/>
+              <a:defRPr/>
+            </a:pPr>
             <a:r>
               <a:rPr lang="en-US" dirty="0"/>
-              <a:t>This is your 'vibe coding' showcase slide. Do NOT show a wall of SQL. Frame each case through the lens of 'what goes wrong if we don't handle this.' The shelfware case: 'an un-deployed product means an unprotected attack surface — I built a hard floor that drops the entire score to zero. No partial credit.' The expansion case: 'This turns a billing risk into a pipeline generation tool for the field.'</a:t>
-            </a:r>
+              <a:t>Talking points to touch during the slide</a:t>
+            </a:r>
+          </a:p>
+          <a:p>
+            <a:pPr marL="171450" indent="-171450">
+              <a:buFontTx/>
+              <a:buChar char="-"/>
+            </a:pPr>
+            <a:r>
+              <a:rPr lang="en-US" dirty="0"/>
+              <a:t>Why these values?</a:t>
+            </a:r>
+          </a:p>
+          <a:p>
+            <a:pPr marL="171450" indent="-171450">
+              <a:buFontTx/>
+              <a:buChar char="-"/>
+            </a:pPr>
+            <a:r>
+              <a:rPr lang="en-US" dirty="0"/>
+              <a:t>Why not take real support </a:t>
+            </a:r>
+            <a:r>
+              <a:rPr lang="en-US" dirty="0" err="1"/>
+              <a:t>tks</a:t>
+            </a:r>
+            <a:r>
+              <a:rPr lang="en-US" dirty="0"/>
+              <a:t> in considerations?</a:t>
+            </a:r>
+          </a:p>
+          <a:p>
+            <a:pPr marL="171450" indent="-171450">
+              <a:buFontTx/>
+              <a:buChar char="-"/>
+            </a:pPr>
+            <a:r>
+              <a:rPr lang="en-US" dirty="0"/>
+              <a:t>Why these 3 sets only?</a:t>
+            </a:r>
+          </a:p>
+          <a:p>
+            <a:pPr marL="171450" indent="-171450">
+              <a:buFontTx/>
+              <a:buChar char="-"/>
+            </a:pPr>
+            <a:endParaRPr lang="en-US" dirty="0"/>
           </a:p>
         </p:txBody>
       </p:sp>
@@ -1107,25 +2040,81 @@
           <a:bodyPr/>
           <a:lstStyle/>
           <a:p>
+            <a:pPr marL="0" marR="0" lvl="0" indent="0" algn="l" defTabSz="914400" rtl="0" eaLnBrk="1" fontAlgn="auto" latinLnBrk="0" hangingPunct="1">
+              <a:lnSpc>
+                <a:spcPct val="100000"/>
+              </a:lnSpc>
+              <a:spcBef>
+                <a:spcPts val="0"/>
+              </a:spcBef>
+              <a:spcAft>
+                <a:spcPts val="0"/>
+              </a:spcAft>
+              <a:buClrTx/>
+              <a:buSzTx/>
+              <a:buFontTx/>
+              <a:buNone/>
+              <a:tabLst/>
+              <a:defRPr/>
+            </a:pPr>
             <a:r>
               <a:rPr lang="en-US" dirty="0"/>
-              <a:t>DEMO MOMENT: Switch to the live Streamlit dashboard here. Walk through: (1) Portfolio page — show the $1.4B ARR at risk number. (2) Change month selector — show how everything updates. (3) Rep drilldown — show a shelfware account with $0 Realized ARR despite high contracted value. This is a production-aligned prototype: synthetic data, </a:t>
+              <a:t>Talking points to touch during the slide</a:t>
+            </a:r>
+          </a:p>
+          <a:p>
+            <a:pPr marL="171450" indent="-171450">
+              <a:buFontTx/>
+              <a:buChar char="-"/>
+            </a:pPr>
+            <a:r>
+              <a:rPr lang="en-US" dirty="0"/>
+              <a:t>Walk through various personas </a:t>
+            </a:r>
+          </a:p>
+          <a:p>
+            <a:pPr marL="171450" indent="-171450">
+              <a:buFontTx/>
+              <a:buChar char="-"/>
+            </a:pPr>
+            <a:r>
+              <a:rPr lang="en-US" dirty="0"/>
+              <a:t>Executive </a:t>
+            </a:r>
+          </a:p>
+          <a:p>
+            <a:pPr marL="171450" indent="-171450">
+              <a:buFontTx/>
+              <a:buChar char="-"/>
+            </a:pPr>
+            <a:r>
+              <a:rPr lang="en-US" dirty="0"/>
+              <a:t>CSM </a:t>
             </a:r>
             <a:r>
               <a:rPr lang="en-US" dirty="0" err="1"/>
-              <a:t>BigQuery</a:t>
-            </a:r>
+              <a:t>mgr</a:t>
+            </a:r>
+            <a:endParaRPr lang="en-US" dirty="0"/>
+          </a:p>
+          <a:p>
+            <a:pPr marL="171450" indent="-171450">
+              <a:buFontTx/>
+              <a:buChar char="-"/>
+            </a:pPr>
             <a:r>
               <a:rPr lang="en-US" dirty="0"/>
-              <a:t> pipeline, automated quality gates, and a live </a:t>
-            </a:r>
-            <a:r>
-              <a:rPr lang="en-US" dirty="0" err="1"/>
-              <a:t>Streamlit</a:t>
-            </a:r>
+              <a:t>IC and </a:t>
+            </a:r>
+          </a:p>
+          <a:p>
+            <a:pPr marL="171450" indent="-171450">
+              <a:buFontTx/>
+              <a:buChar char="-"/>
+            </a:pPr>
             <a:r>
               <a:rPr lang="en-US" dirty="0"/>
-              <a:t> dashboard.</a:t>
+              <a:t>Data analytics team</a:t>
             </a:r>
           </a:p>
         </p:txBody>
@@ -1210,9 +2199,56 @@
           <a:bodyPr/>
           <a:lstStyle/>
           <a:p>
+            <a:pPr marL="0" marR="0" lvl="0" indent="0" algn="l" defTabSz="914400" rtl="0" eaLnBrk="1" fontAlgn="auto" latinLnBrk="0" hangingPunct="1">
+              <a:lnSpc>
+                <a:spcPct val="100000"/>
+              </a:lnSpc>
+              <a:spcBef>
+                <a:spcPts val="0"/>
+              </a:spcBef>
+              <a:spcAft>
+                <a:spcPts val="0"/>
+              </a:spcAft>
+              <a:buClrTx/>
+              <a:buSzTx/>
+              <a:buFontTx/>
+              <a:buNone/>
+              <a:tabLst/>
+              <a:defRPr/>
+            </a:pPr>
             <a:r>
               <a:rPr lang="en-US" dirty="0"/>
-              <a:t>This slide shows intellectual honesty — the panel respects PMs who identify what they would do differently. Key talking point: 'Agentic workflows change the loop. Right now, the dashboard surfaces signals and CSMs act. With Claude Agents, Tier 2 alerts get auto-drafted intervention emails — the human approves, not discovers.' The Phase 2 note shows you understand the $15B NGS ARR goal runs through platform depth, not new logos.</a:t>
+              <a:t>Talking points to touch during the slide</a:t>
+            </a:r>
+          </a:p>
+          <a:p>
+            <a:pPr marL="171450" indent="-171450">
+              <a:buFontTx/>
+              <a:buChar char="-"/>
+            </a:pPr>
+            <a:r>
+              <a:rPr lang="en-US" dirty="0"/>
+              <a:t>How to use AI / ML </a:t>
+            </a:r>
+          </a:p>
+          <a:p>
+            <a:pPr marL="171450" indent="-171450">
+              <a:buFontTx/>
+              <a:buChar char="-"/>
+            </a:pPr>
+            <a:r>
+              <a:rPr lang="en-US" dirty="0"/>
+              <a:t>Why data is important across org </a:t>
+            </a:r>
+          </a:p>
+          <a:p>
+            <a:pPr marL="171450" indent="-171450">
+              <a:buFontTx/>
+              <a:buChar char="-"/>
+            </a:pPr>
+            <a:r>
+              <a:rPr lang="en-US" dirty="0"/>
+              <a:t>Add if require what other technical solution could be used </a:t>
             </a:r>
           </a:p>
         </p:txBody>
@@ -2193,45 +3229,6 @@
       </p:sp>
       <p:sp>
         <p:nvSpPr>
-          <p:cNvPr id="19" name="Text 17"/>
-          <p:cNvSpPr/>
-          <p:nvPr/>
-        </p:nvSpPr>
-        <p:spPr>
-          <a:xfrm>
-            <a:off x="502920" y="4297680"/>
-            <a:ext cx="8138160" cy="274320"/>
-          </a:xfrm>
-          <a:prstGeom prst="rect">
-            <a:avLst/>
-          </a:prstGeom>
-          <a:noFill/>
-          <a:ln/>
-        </p:spPr>
-        <p:txBody>
-          <a:bodyPr wrap="square" rtlCol="0" anchor="ctr"/>
-          <a:lstStyle/>
-          <a:p>
-            <a:pPr marL="0" indent="0" algn="l">
-              <a:buNone/>
-            </a:pPr>
-            <a:r>
-              <a:rPr lang="en-US" sz="1000" dirty="0">
-                <a:solidFill>
-                  <a:srgbClr val="8FB3CC"/>
-                </a:solidFill>
-                <a:latin typeface="Calibri" pitchFamily="34" charset="0"/>
-                <a:ea typeface="Calibri" pitchFamily="34" charset="-122"/>
-                <a:cs typeface="Calibri" pitchFamily="34" charset="-120"/>
-              </a:rPr>
-              <a:t>Dharmesh Bhagat  ·  Principal PM, Data &amp; AI Analytics  ·  GCS Case Study</a:t>
-            </a:r>
-            <a:endParaRPr lang="en-US" sz="1000" dirty="0"/>
-          </a:p>
-        </p:txBody>
-      </p:sp>
-      <p:sp>
-        <p:nvSpPr>
           <p:cNvPr id="20" name="Text 17">
             <a:extLst>
               <a:ext uri="{FF2B5EF4-FFF2-40B4-BE49-F238E27FC236}">
@@ -2267,6 +3264,60 @@
               </a:rPr>
               <a:t>Synthetic prototype results are scaled here to show enterprise-level business impact.</a:t>
             </a:r>
+          </a:p>
+        </p:txBody>
+      </p:sp>
+      <p:sp>
+        <p:nvSpPr>
+          <p:cNvPr id="21" name="Text 17">
+            <a:extLst>
+              <a:ext uri="{FF2B5EF4-FFF2-40B4-BE49-F238E27FC236}">
+                <a16:creationId xmlns:a16="http://schemas.microsoft.com/office/drawing/2014/main" id="{58C9188B-9E83-E0FB-99D9-0251BF9D89C8}"/>
+              </a:ext>
+            </a:extLst>
+          </p:cNvPr>
+          <p:cNvSpPr/>
+          <p:nvPr/>
+        </p:nvSpPr>
+        <p:spPr>
+          <a:xfrm>
+            <a:off x="502920" y="4517136"/>
+            <a:ext cx="8138160" cy="274320"/>
+          </a:xfrm>
+          <a:prstGeom prst="rect">
+            <a:avLst/>
+          </a:prstGeom>
+          <a:noFill/>
+          <a:ln/>
+        </p:spPr>
+        <p:txBody>
+          <a:bodyPr wrap="square" rtlCol="0" anchor="ctr"/>
+          <a:lstStyle/>
+          <a:p>
+            <a:pPr algn="ctr"/>
+            <a:r>
+              <a:rPr lang="en-US" sz="1500" b="1" dirty="0">
+                <a:solidFill>
+                  <a:srgbClr val="8FB3CC"/>
+                </a:solidFill>
+                <a:latin typeface="Calibri" pitchFamily="34" charset="0"/>
+                <a:ea typeface="Calibri" pitchFamily="34" charset="-122"/>
+                <a:cs typeface="Calibri" pitchFamily="34" charset="-120"/>
+              </a:rPr>
+              <a:t>Agenda</a:t>
+            </a:r>
+            <a:r>
+              <a:rPr lang="en-US" sz="1500" dirty="0">
+                <a:solidFill>
+                  <a:srgbClr val="8FB3CC"/>
+                </a:solidFill>
+                <a:latin typeface="Calibri" pitchFamily="34" charset="0"/>
+                <a:ea typeface="Calibri" pitchFamily="34" charset="-122"/>
+                <a:cs typeface="Calibri" pitchFamily="34" charset="-120"/>
+              </a:rPr>
+              <a:t>  ·  Introduction · Context &amp; Problem ·  Technical Deep Dive · Evaluation &amp;Results · Q&amp;A </a:t>
+            </a:r>
+            <a:endParaRPr lang="en-US" sz="1500" dirty="0"/>
           </a:p>
         </p:txBody>
       </p:sp>
@@ -2954,7 +4005,7 @@
           <a:bodyPr/>
           <a:lstStyle/>
           <a:p>
-            <a:endParaRPr lang="en-US" dirty="0"/>
+            <a:endParaRPr lang="en-US" sz="2500" dirty="0"/>
           </a:p>
         </p:txBody>
       </p:sp>
@@ -2972,8 +4023,8 @@
         </p:nvSpPr>
         <p:spPr>
           <a:xfrm>
-            <a:off x="6160020" y="4158653"/>
-            <a:ext cx="2670048" cy="475488"/>
+            <a:off x="6254495" y="3825329"/>
+            <a:ext cx="2670048" cy="1374305"/>
           </a:xfrm>
           <a:prstGeom prst="rect">
             <a:avLst/>
@@ -2992,7 +4043,7 @@
               <a:buSzPct val="100000"/>
             </a:pPr>
             <a:r>
-              <a:rPr lang="en-US" sz="1000" b="1" dirty="0">
+              <a:rPr lang="en-US" sz="1500" b="1" dirty="0">
                 <a:solidFill>
                   <a:srgbClr val="00C9B1"/>
                 </a:solidFill>
@@ -3009,7 +4060,7 @@
               <a:buSzPct val="100000"/>
             </a:pPr>
             <a:r>
-              <a:rPr lang="en-US" sz="1000" b="1" dirty="0">
+              <a:rPr lang="en-US" sz="1500" b="1" dirty="0">
                 <a:solidFill>
                   <a:srgbClr val="00C9B1"/>
                 </a:solidFill>
@@ -3026,7 +4077,7 @@
               <a:buSzPct val="100000"/>
             </a:pPr>
             <a:r>
-              <a:rPr lang="en-US" sz="1000" b="1" dirty="0">
+              <a:rPr lang="en-US" sz="1500" b="1" dirty="0">
                 <a:solidFill>
                   <a:srgbClr val="00C9B1"/>
                 </a:solidFill>
@@ -3043,7 +4094,7 @@
               <a:buSzPct val="100000"/>
             </a:pPr>
             <a:r>
-              <a:rPr lang="en-US" sz="1000" b="1" dirty="0">
+              <a:rPr lang="en-US" sz="1500" b="1" dirty="0">
                 <a:solidFill>
                   <a:srgbClr val="00C9B1"/>
                 </a:solidFill>
@@ -3069,6 +4120,95 @@
 </file>
 
 <file path=ppt/slides/slide11.xml><?xml version="1.0" encoding="utf-8"?>
+<p:sld xmlns:a="http://schemas.openxmlformats.org/drawingml/2006/main" xmlns:r="http://schemas.openxmlformats.org/officeDocument/2006/relationships" xmlns:p="http://schemas.openxmlformats.org/presentationml/2006/main">
+  <p:cSld>
+    <p:bg>
+      <p:bgPr>
+        <a:solidFill>
+          <a:srgbClr val="0A1628"/>
+        </a:solidFill>
+        <a:effectLst/>
+      </p:bgPr>
+    </p:bg>
+    <p:spTree>
+      <p:nvGrpSpPr>
+        <p:cNvPr id="1" name="">
+          <a:extLst>
+            <a:ext uri="{FF2B5EF4-FFF2-40B4-BE49-F238E27FC236}">
+              <a16:creationId xmlns:a16="http://schemas.microsoft.com/office/drawing/2014/main" id="{34F01480-271D-844E-7791-4D4C9B601178}"/>
+            </a:ext>
+          </a:extLst>
+        </p:cNvPr>
+        <p:cNvGrpSpPr/>
+        <p:nvPr/>
+      </p:nvGrpSpPr>
+      <p:grpSpPr>
+        <a:xfrm>
+          <a:off x="0" y="0"/>
+          <a:ext cx="0" cy="0"/>
+          <a:chOff x="0" y="0"/>
+          <a:chExt cx="0" cy="0"/>
+        </a:xfrm>
+      </p:grpSpPr>
+      <p:sp>
+        <p:nvSpPr>
+          <p:cNvPr id="3" name="Text 1">
+            <a:extLst>
+              <a:ext uri="{FF2B5EF4-FFF2-40B4-BE49-F238E27FC236}">
+                <a16:creationId xmlns:a16="http://schemas.microsoft.com/office/drawing/2014/main" id="{6C86479E-5A18-51B0-4B83-B3943652C672}"/>
+              </a:ext>
+            </a:extLst>
+          </p:cNvPr>
+          <p:cNvSpPr/>
+          <p:nvPr/>
+        </p:nvSpPr>
+        <p:spPr>
+          <a:xfrm>
+            <a:off x="3942860" y="2114550"/>
+            <a:ext cx="1074616" cy="457200"/>
+          </a:xfrm>
+          <a:prstGeom prst="rect">
+            <a:avLst/>
+          </a:prstGeom>
+          <a:noFill/>
+          <a:ln/>
+        </p:spPr>
+        <p:txBody>
+          <a:bodyPr wrap="square" rtlCol="0" anchor="ctr"/>
+          <a:lstStyle/>
+          <a:p>
+            <a:r>
+              <a:rPr lang="en-US" sz="3000" b="1" dirty="0">
+                <a:solidFill>
+                  <a:srgbClr val="00C9B1"/>
+                </a:solidFill>
+                <a:latin typeface="Cambria" pitchFamily="34" charset="0"/>
+              </a:rPr>
+              <a:t>Q&amp;A </a:t>
+            </a:r>
+            <a:endParaRPr lang="en-US" sz="2000" b="1" dirty="0">
+              <a:solidFill>
+                <a:srgbClr val="00C9B1"/>
+              </a:solidFill>
+              <a:latin typeface="Cambria" pitchFamily="34" charset="0"/>
+            </a:endParaRPr>
+          </a:p>
+        </p:txBody>
+      </p:sp>
+    </p:spTree>
+    <p:extLst>
+      <p:ext uri="{BB962C8B-B14F-4D97-AF65-F5344CB8AC3E}">
+        <p14:creationId xmlns:p14="http://schemas.microsoft.com/office/powerpoint/2010/main" val="739538735"/>
+      </p:ext>
+    </p:extLst>
+  </p:cSld>
+  <p:clrMapOvr>
+    <a:masterClrMapping/>
+  </p:clrMapOvr>
+</p:sld>
+</file>
+
+<file path=ppt/slides/slide12.xml><?xml version="1.0" encoding="utf-8"?>
 <p:sld xmlns:a="http://schemas.openxmlformats.org/drawingml/2006/main" xmlns:r="http://schemas.openxmlformats.org/officeDocument/2006/relationships" xmlns:p="http://schemas.openxmlformats.org/presentationml/2006/main">
   <p:cSld name="Slide 9">
     <p:bg>
@@ -4421,6 +5561,760 @@
         </p:txBody>
       </p:sp>
     </p:spTree>
+  </p:cSld>
+  <p:clrMapOvr>
+    <a:masterClrMapping/>
+  </p:clrMapOvr>
+</p:sld>
+</file>
+
+<file path=ppt/slides/slide13.xml><?xml version="1.0" encoding="utf-8"?>
+<p:sld xmlns:a="http://schemas.openxmlformats.org/drawingml/2006/main" xmlns:r="http://schemas.openxmlformats.org/officeDocument/2006/relationships" xmlns:p="http://schemas.openxmlformats.org/presentationml/2006/main">
+  <p:cSld>
+    <p:bg>
+      <p:bgPr>
+        <a:solidFill>
+          <a:srgbClr val="F0F4F8"/>
+        </a:solidFill>
+        <a:effectLst/>
+      </p:bgPr>
+    </p:bg>
+    <p:spTree>
+      <p:nvGrpSpPr>
+        <p:cNvPr id="1" name="">
+          <a:extLst>
+            <a:ext uri="{FF2B5EF4-FFF2-40B4-BE49-F238E27FC236}">
+              <a16:creationId xmlns:a16="http://schemas.microsoft.com/office/drawing/2014/main" id="{DDD96C14-2A3E-FD26-8877-FC0D0EE540C0}"/>
+            </a:ext>
+          </a:extLst>
+        </p:cNvPr>
+        <p:cNvGrpSpPr/>
+        <p:nvPr/>
+      </p:nvGrpSpPr>
+      <p:grpSpPr>
+        <a:xfrm>
+          <a:off x="0" y="0"/>
+          <a:ext cx="0" cy="0"/>
+          <a:chOff x="0" y="0"/>
+          <a:chExt cx="0" cy="0"/>
+        </a:xfrm>
+      </p:grpSpPr>
+      <p:sp>
+        <p:nvSpPr>
+          <p:cNvPr id="2" name="Text 0">
+            <a:extLst>
+              <a:ext uri="{FF2B5EF4-FFF2-40B4-BE49-F238E27FC236}">
+                <a16:creationId xmlns:a16="http://schemas.microsoft.com/office/drawing/2014/main" id="{75C19553-F94F-726B-439F-9EA2AF1E7320}"/>
+              </a:ext>
+            </a:extLst>
+          </p:cNvPr>
+          <p:cNvSpPr/>
+          <p:nvPr/>
+        </p:nvSpPr>
+        <p:spPr>
+          <a:xfrm>
+            <a:off x="457200" y="256032"/>
+            <a:ext cx="3466123" cy="1908830"/>
+          </a:xfrm>
+          <a:prstGeom prst="rect">
+            <a:avLst/>
+          </a:prstGeom>
+          <a:noFill/>
+          <a:ln/>
+        </p:spPr>
+        <p:txBody>
+          <a:bodyPr wrap="square" rtlCol="0" anchor="ctr"/>
+          <a:lstStyle/>
+          <a:p>
+            <a:r>
+              <a:rPr lang="en-US" sz="2800" b="1" dirty="0">
+                <a:solidFill>
+                  <a:srgbClr val="0A1628"/>
+                </a:solidFill>
+                <a:latin typeface="Cambria" pitchFamily="34" charset="0"/>
+              </a:rPr>
+              <a:t>Why choose Realized ARR metric</a:t>
+            </a:r>
+            <a:endParaRPr lang="en-US" sz="1500" dirty="0"/>
+          </a:p>
+        </p:txBody>
+      </p:sp>
+      <p:pic>
+        <p:nvPicPr>
+          <p:cNvPr id="35" name="Picture 34">
+            <a:extLst>
+              <a:ext uri="{FF2B5EF4-FFF2-40B4-BE49-F238E27FC236}">
+                <a16:creationId xmlns:a16="http://schemas.microsoft.com/office/drawing/2014/main" id="{6D5A788E-CF0D-E5C2-0EAD-E41BE432744F}"/>
+              </a:ext>
+            </a:extLst>
+          </p:cNvPr>
+          <p:cNvPicPr>
+            <a:picLocks noChangeAspect="1"/>
+          </p:cNvPicPr>
+          <p:nvPr/>
+        </p:nvPicPr>
+        <p:blipFill>
+          <a:blip r:embed="rId3"/>
+          <a:stretch>
+            <a:fillRect/>
+          </a:stretch>
+        </p:blipFill>
+        <p:spPr>
+          <a:xfrm>
+            <a:off x="4141225" y="0"/>
+            <a:ext cx="4909917" cy="5143500"/>
+          </a:xfrm>
+          <a:prstGeom prst="rect">
+            <a:avLst/>
+          </a:prstGeom>
+        </p:spPr>
+      </p:pic>
+      <p:sp>
+        <p:nvSpPr>
+          <p:cNvPr id="36" name="TextBox 35">
+            <a:extLst>
+              <a:ext uri="{FF2B5EF4-FFF2-40B4-BE49-F238E27FC236}">
+                <a16:creationId xmlns:a16="http://schemas.microsoft.com/office/drawing/2014/main" id="{7F1DD2BD-DC9A-902B-128B-0236DACAE374}"/>
+              </a:ext>
+            </a:extLst>
+          </p:cNvPr>
+          <p:cNvSpPr txBox="1"/>
+          <p:nvPr/>
+        </p:nvSpPr>
+        <p:spPr>
+          <a:xfrm>
+            <a:off x="457200" y="2076365"/>
+            <a:ext cx="2725426" cy="646331"/>
+          </a:xfrm>
+          <a:prstGeom prst="rect">
+            <a:avLst/>
+          </a:prstGeom>
+          <a:noFill/>
+        </p:spPr>
+        <p:txBody>
+          <a:bodyPr wrap="none" rtlCol="0">
+            <a:spAutoFit/>
+          </a:bodyPr>
+          <a:lstStyle/>
+          <a:p>
+            <a:r>
+              <a:rPr lang="en-US" dirty="0"/>
+              <a:t>Detailed explanation found</a:t>
+            </a:r>
+          </a:p>
+          <a:p>
+            <a:r>
+              <a:rPr lang="en-US" dirty="0"/>
+              <a:t>In BRD Section 6 </a:t>
+            </a:r>
+            <a:r>
+              <a:rPr lang="en-US" dirty="0">
+                <a:hlinkClick r:id="rId4"/>
+              </a:rPr>
+              <a:t>Link</a:t>
+            </a:r>
+            <a:r>
+              <a:rPr lang="en-US" dirty="0"/>
+              <a:t> </a:t>
+            </a:r>
+          </a:p>
+        </p:txBody>
+      </p:sp>
+      <p:sp>
+        <p:nvSpPr>
+          <p:cNvPr id="3" name="TextBox 2">
+            <a:extLst>
+              <a:ext uri="{FF2B5EF4-FFF2-40B4-BE49-F238E27FC236}">
+                <a16:creationId xmlns:a16="http://schemas.microsoft.com/office/drawing/2014/main" id="{BE1B9DF2-A59B-5170-3F96-89DE0EB62AC0}"/>
+              </a:ext>
+            </a:extLst>
+          </p:cNvPr>
+          <p:cNvSpPr txBox="1"/>
+          <p:nvPr/>
+        </p:nvSpPr>
+        <p:spPr>
+          <a:xfrm>
+            <a:off x="457200" y="3108032"/>
+            <a:ext cx="2805343" cy="1754326"/>
+          </a:xfrm>
+          <a:prstGeom prst="rect">
+            <a:avLst/>
+          </a:prstGeom>
+          <a:noFill/>
+        </p:spPr>
+        <p:txBody>
+          <a:bodyPr wrap="square" rtlCol="0">
+            <a:spAutoFit/>
+          </a:bodyPr>
+          <a:lstStyle/>
+          <a:p>
+            <a:r>
+              <a:rPr lang="en-US" dirty="0"/>
+              <a:t>PANW’s </a:t>
+            </a:r>
+            <a:r>
+              <a:rPr lang="en-US" dirty="0" err="1"/>
+              <a:t>platformization</a:t>
+            </a:r>
+            <a:r>
+              <a:rPr lang="en-US" dirty="0"/>
+              <a:t> strategy creates the need for post-sales realization intelligence — Realized ARR is my proposal for that operating layer.</a:t>
+            </a:r>
+          </a:p>
+        </p:txBody>
+      </p:sp>
+    </p:spTree>
+    <p:extLst>
+      <p:ext uri="{BB962C8B-B14F-4D97-AF65-F5344CB8AC3E}">
+        <p14:creationId xmlns:p14="http://schemas.microsoft.com/office/powerpoint/2010/main" val="3264979642"/>
+      </p:ext>
+    </p:extLst>
+  </p:cSld>
+  <p:clrMapOvr>
+    <a:masterClrMapping/>
+  </p:clrMapOvr>
+</p:sld>
+</file>
+
+<file path=ppt/slides/slide14.xml><?xml version="1.0" encoding="utf-8"?>
+<p:sld xmlns:a="http://schemas.openxmlformats.org/drawingml/2006/main" xmlns:r="http://schemas.openxmlformats.org/officeDocument/2006/relationships" xmlns:p="http://schemas.openxmlformats.org/presentationml/2006/main">
+  <p:cSld>
+    <p:bg>
+      <p:bgPr>
+        <a:solidFill>
+          <a:srgbClr val="F0F4F8"/>
+        </a:solidFill>
+        <a:effectLst/>
+      </p:bgPr>
+    </p:bg>
+    <p:spTree>
+      <p:nvGrpSpPr>
+        <p:cNvPr id="1" name="">
+          <a:extLst>
+            <a:ext uri="{FF2B5EF4-FFF2-40B4-BE49-F238E27FC236}">
+              <a16:creationId xmlns:a16="http://schemas.microsoft.com/office/drawing/2014/main" id="{8F7A1131-6C60-793D-CEE3-2C8547D3B69F}"/>
+            </a:ext>
+          </a:extLst>
+        </p:cNvPr>
+        <p:cNvGrpSpPr/>
+        <p:nvPr/>
+      </p:nvGrpSpPr>
+      <p:grpSpPr>
+        <a:xfrm>
+          <a:off x="0" y="0"/>
+          <a:ext cx="0" cy="0"/>
+          <a:chOff x="0" y="0"/>
+          <a:chExt cx="0" cy="0"/>
+        </a:xfrm>
+      </p:grpSpPr>
+      <p:sp>
+        <p:nvSpPr>
+          <p:cNvPr id="2" name="Text 0">
+            <a:extLst>
+              <a:ext uri="{FF2B5EF4-FFF2-40B4-BE49-F238E27FC236}">
+                <a16:creationId xmlns:a16="http://schemas.microsoft.com/office/drawing/2014/main" id="{5D659118-A6B6-784B-8735-2EE44CC60EE4}"/>
+              </a:ext>
+            </a:extLst>
+          </p:cNvPr>
+          <p:cNvSpPr/>
+          <p:nvPr/>
+        </p:nvSpPr>
+        <p:spPr>
+          <a:xfrm>
+            <a:off x="457200" y="256032"/>
+            <a:ext cx="3466123" cy="1908830"/>
+          </a:xfrm>
+          <a:prstGeom prst="rect">
+            <a:avLst/>
+          </a:prstGeom>
+          <a:noFill/>
+          <a:ln/>
+        </p:spPr>
+        <p:txBody>
+          <a:bodyPr wrap="square" rtlCol="0" anchor="ctr"/>
+          <a:lstStyle/>
+          <a:p>
+            <a:r>
+              <a:rPr lang="en-US" sz="2800" b="1" dirty="0">
+                <a:solidFill>
+                  <a:srgbClr val="0A1628"/>
+                </a:solidFill>
+                <a:latin typeface="Cambria" pitchFamily="34" charset="0"/>
+              </a:rPr>
+              <a:t>Why choose PRS?</a:t>
+            </a:r>
+            <a:endParaRPr lang="en-US" sz="1500" dirty="0"/>
+          </a:p>
+        </p:txBody>
+      </p:sp>
+      <p:sp>
+        <p:nvSpPr>
+          <p:cNvPr id="36" name="TextBox 35">
+            <a:extLst>
+              <a:ext uri="{FF2B5EF4-FFF2-40B4-BE49-F238E27FC236}">
+                <a16:creationId xmlns:a16="http://schemas.microsoft.com/office/drawing/2014/main" id="{96FCC452-6C4C-1D96-DE0D-6B6741DA7260}"/>
+              </a:ext>
+            </a:extLst>
+          </p:cNvPr>
+          <p:cNvSpPr txBox="1"/>
+          <p:nvPr/>
+        </p:nvSpPr>
+        <p:spPr>
+          <a:xfrm>
+            <a:off x="593969" y="1518531"/>
+            <a:ext cx="2725426" cy="646331"/>
+          </a:xfrm>
+          <a:prstGeom prst="rect">
+            <a:avLst/>
+          </a:prstGeom>
+          <a:noFill/>
+        </p:spPr>
+        <p:txBody>
+          <a:bodyPr wrap="none" rtlCol="0">
+            <a:spAutoFit/>
+          </a:bodyPr>
+          <a:lstStyle/>
+          <a:p>
+            <a:r>
+              <a:rPr lang="en-US" dirty="0"/>
+              <a:t>Detailed explanation found</a:t>
+            </a:r>
+          </a:p>
+          <a:p>
+            <a:r>
+              <a:rPr lang="en-US" dirty="0"/>
+              <a:t>In BRD Section 8 </a:t>
+            </a:r>
+            <a:r>
+              <a:rPr lang="en-US" dirty="0">
+                <a:hlinkClick r:id="rId3"/>
+              </a:rPr>
+              <a:t>Link</a:t>
+            </a:r>
+            <a:r>
+              <a:rPr lang="en-US" dirty="0"/>
+              <a:t> </a:t>
+            </a:r>
+          </a:p>
+        </p:txBody>
+      </p:sp>
+      <p:pic>
+        <p:nvPicPr>
+          <p:cNvPr id="3" name="Picture 2">
+            <a:extLst>
+              <a:ext uri="{FF2B5EF4-FFF2-40B4-BE49-F238E27FC236}">
+                <a16:creationId xmlns:a16="http://schemas.microsoft.com/office/drawing/2014/main" id="{153FF101-AFAF-9FC2-69FB-EA9F8626EA03}"/>
+              </a:ext>
+            </a:extLst>
+          </p:cNvPr>
+          <p:cNvPicPr>
+            <a:picLocks noChangeAspect="1"/>
+          </p:cNvPicPr>
+          <p:nvPr/>
+        </p:nvPicPr>
+        <p:blipFill>
+          <a:blip r:embed="rId4"/>
+          <a:stretch>
+            <a:fillRect/>
+          </a:stretch>
+        </p:blipFill>
+        <p:spPr>
+          <a:xfrm>
+            <a:off x="3923322" y="106213"/>
+            <a:ext cx="5165969" cy="4931074"/>
+          </a:xfrm>
+          <a:prstGeom prst="rect">
+            <a:avLst/>
+          </a:prstGeom>
+        </p:spPr>
+      </p:pic>
+      <p:sp>
+        <p:nvSpPr>
+          <p:cNvPr id="4" name="TextBox 3">
+            <a:extLst>
+              <a:ext uri="{FF2B5EF4-FFF2-40B4-BE49-F238E27FC236}">
+                <a16:creationId xmlns:a16="http://schemas.microsoft.com/office/drawing/2014/main" id="{9AA5DA06-5291-73A8-7364-2772886087A3}"/>
+              </a:ext>
+            </a:extLst>
+          </p:cNvPr>
+          <p:cNvSpPr txBox="1"/>
+          <p:nvPr/>
+        </p:nvSpPr>
+        <p:spPr>
+          <a:xfrm>
+            <a:off x="414817" y="2314681"/>
+            <a:ext cx="3151825" cy="2492990"/>
+          </a:xfrm>
+          <a:prstGeom prst="rect">
+            <a:avLst/>
+          </a:prstGeom>
+          <a:noFill/>
+        </p:spPr>
+        <p:txBody>
+          <a:bodyPr wrap="none" rtlCol="0">
+            <a:spAutoFit/>
+          </a:bodyPr>
+          <a:lstStyle/>
+          <a:p>
+            <a:pPr marL="171450" indent="-171450">
+              <a:buFont typeface="Wingdings" pitchFamily="2" charset="2"/>
+              <a:buChar char="ü"/>
+            </a:pPr>
+            <a:r>
+              <a:rPr lang="en-US" sz="1200" b="1" dirty="0"/>
+              <a:t>With current data info Choose PRS Option 1</a:t>
+            </a:r>
+          </a:p>
+          <a:p>
+            <a:r>
+              <a:rPr lang="en-US" sz="1200" dirty="0"/>
+              <a:t>PRS Weights – 40/30/20/10</a:t>
+            </a:r>
+          </a:p>
+          <a:p>
+            <a:r>
+              <a:rPr lang="en-US" sz="1200" dirty="0"/>
+              <a:t>Deployment Score (40%)</a:t>
+            </a:r>
+          </a:p>
+          <a:p>
+            <a:r>
+              <a:rPr lang="en-US" sz="1200" dirty="0"/>
+              <a:t>  + Sustained Usage Score (30%)</a:t>
+            </a:r>
+          </a:p>
+          <a:p>
+            <a:r>
+              <a:rPr lang="en-US" sz="1200" dirty="0"/>
+              <a:t>  + Technical Health Score (20%)</a:t>
+            </a:r>
+          </a:p>
+          <a:p>
+            <a:r>
+              <a:rPr lang="en-US" sz="1200" dirty="0"/>
+              <a:t>  + Expansion Momentum (10%)</a:t>
+            </a:r>
+          </a:p>
+          <a:p>
+            <a:endParaRPr lang="en-US" sz="1200" dirty="0"/>
+          </a:p>
+          <a:p>
+            <a:pPr marL="171450" indent="-171450">
+              <a:buFont typeface="Wingdings" pitchFamily="2" charset="2"/>
+              <a:buChar char="ü"/>
+            </a:pPr>
+            <a:r>
+              <a:rPr lang="en-US" sz="1200" b="1" dirty="0"/>
+              <a:t>With additional data Choose PRS Option 2</a:t>
+            </a:r>
+          </a:p>
+          <a:p>
+            <a:r>
+              <a:rPr lang="en-US" sz="1200" dirty="0"/>
+              <a:t>With </a:t>
+            </a:r>
+            <a:r>
+              <a:rPr lang="en-US" sz="1200" dirty="0" err="1"/>
+              <a:t>platformization</a:t>
+            </a:r>
+            <a:r>
+              <a:rPr lang="en-US" sz="1200" dirty="0"/>
+              <a:t> in consideration (Phase 2)</a:t>
+            </a:r>
+          </a:p>
+          <a:p>
+            <a:r>
+              <a:rPr lang="en-US" sz="1200" dirty="0"/>
+              <a:t>Coverage Depth (35%) </a:t>
+            </a:r>
+          </a:p>
+          <a:p>
+            <a:r>
+              <a:rPr lang="en-US" sz="1200" dirty="0"/>
+              <a:t>+ Platform Breadth (25%)</a:t>
+            </a:r>
+          </a:p>
+          <a:p>
+            <a:r>
+              <a:rPr lang="en-US" sz="1200" dirty="0"/>
+              <a:t> + Security Outcome (25%) </a:t>
+            </a:r>
+          </a:p>
+          <a:p>
+            <a:r>
+              <a:rPr lang="en-US" sz="1200" dirty="0"/>
+              <a:t>+ Momentum (15%)</a:t>
+            </a:r>
+          </a:p>
+        </p:txBody>
+      </p:sp>
+    </p:spTree>
+    <p:extLst>
+      <p:ext uri="{BB962C8B-B14F-4D97-AF65-F5344CB8AC3E}">
+        <p14:creationId xmlns:p14="http://schemas.microsoft.com/office/powerpoint/2010/main" val="1309533673"/>
+      </p:ext>
+    </p:extLst>
+  </p:cSld>
+  <p:clrMapOvr>
+    <a:masterClrMapping/>
+  </p:clrMapOvr>
+</p:sld>
+</file>
+
+<file path=ppt/slides/slide15.xml><?xml version="1.0" encoding="utf-8"?>
+<p:sld xmlns:a="http://schemas.openxmlformats.org/drawingml/2006/main" xmlns:r="http://schemas.openxmlformats.org/officeDocument/2006/relationships" xmlns:p="http://schemas.openxmlformats.org/presentationml/2006/main">
+  <p:cSld>
+    <p:bg>
+      <p:bgPr>
+        <a:solidFill>
+          <a:srgbClr val="F0F4F8"/>
+        </a:solidFill>
+        <a:effectLst/>
+      </p:bgPr>
+    </p:bg>
+    <p:spTree>
+      <p:nvGrpSpPr>
+        <p:cNvPr id="1" name="">
+          <a:extLst>
+            <a:ext uri="{FF2B5EF4-FFF2-40B4-BE49-F238E27FC236}">
+              <a16:creationId xmlns:a16="http://schemas.microsoft.com/office/drawing/2014/main" id="{67826F75-5CCC-E8E4-BCAF-B504278EBD41}"/>
+            </a:ext>
+          </a:extLst>
+        </p:cNvPr>
+        <p:cNvGrpSpPr/>
+        <p:nvPr/>
+      </p:nvGrpSpPr>
+      <p:grpSpPr>
+        <a:xfrm>
+          <a:off x="0" y="0"/>
+          <a:ext cx="0" cy="0"/>
+          <a:chOff x="0" y="0"/>
+          <a:chExt cx="0" cy="0"/>
+        </a:xfrm>
+      </p:grpSpPr>
+      <p:sp>
+        <p:nvSpPr>
+          <p:cNvPr id="2" name="Text 0">
+            <a:extLst>
+              <a:ext uri="{FF2B5EF4-FFF2-40B4-BE49-F238E27FC236}">
+                <a16:creationId xmlns:a16="http://schemas.microsoft.com/office/drawing/2014/main" id="{7EEB873A-C005-D706-0EB4-A803AA767242}"/>
+              </a:ext>
+            </a:extLst>
+          </p:cNvPr>
+          <p:cNvSpPr/>
+          <p:nvPr/>
+        </p:nvSpPr>
+        <p:spPr>
+          <a:xfrm>
+            <a:off x="472831" y="211014"/>
+            <a:ext cx="5881077" cy="1039447"/>
+          </a:xfrm>
+          <a:prstGeom prst="rect">
+            <a:avLst/>
+          </a:prstGeom>
+          <a:noFill/>
+          <a:ln/>
+        </p:spPr>
+        <p:txBody>
+          <a:bodyPr wrap="square" rtlCol="0" anchor="ctr"/>
+          <a:lstStyle/>
+          <a:p>
+            <a:r>
+              <a:rPr lang="en-US" sz="2800" b="1" dirty="0">
+                <a:solidFill>
+                  <a:srgbClr val="0A1628"/>
+                </a:solidFill>
+                <a:latin typeface="Cambria" pitchFamily="34" charset="0"/>
+              </a:rPr>
+              <a:t>Why choose 40/30/20/10? </a:t>
+            </a:r>
+            <a:endParaRPr lang="en-US" sz="1500" dirty="0"/>
+          </a:p>
+        </p:txBody>
+      </p:sp>
+      <p:sp>
+        <p:nvSpPr>
+          <p:cNvPr id="36" name="TextBox 35">
+            <a:extLst>
+              <a:ext uri="{FF2B5EF4-FFF2-40B4-BE49-F238E27FC236}">
+                <a16:creationId xmlns:a16="http://schemas.microsoft.com/office/drawing/2014/main" id="{682B53B5-792A-1300-082E-7DFF19866C02}"/>
+              </a:ext>
+            </a:extLst>
+          </p:cNvPr>
+          <p:cNvSpPr txBox="1"/>
+          <p:nvPr/>
+        </p:nvSpPr>
+        <p:spPr>
+          <a:xfrm>
+            <a:off x="472831" y="1135577"/>
+            <a:ext cx="7659077" cy="3416320"/>
+          </a:xfrm>
+          <a:prstGeom prst="rect">
+            <a:avLst/>
+          </a:prstGeom>
+          <a:noFill/>
+        </p:spPr>
+        <p:txBody>
+          <a:bodyPr wrap="square" rtlCol="0">
+            <a:spAutoFit/>
+          </a:bodyPr>
+          <a:lstStyle/>
+          <a:p>
+            <a:r>
+              <a:rPr lang="en-US" sz="1200" b="1" dirty="0">
+                <a:latin typeface="Calibri" panose="020F0502020204030204" pitchFamily="34" charset="0"/>
+                <a:cs typeface="Calibri" panose="020F0502020204030204" pitchFamily="34" charset="0"/>
+              </a:rPr>
+              <a:t>My thought process </a:t>
+            </a:r>
+          </a:p>
+          <a:p>
+            <a:endParaRPr lang="en-US" sz="1200" dirty="0">
+              <a:latin typeface="Calibri" panose="020F0502020204030204" pitchFamily="34" charset="0"/>
+              <a:cs typeface="Calibri" panose="020F0502020204030204" pitchFamily="34" charset="0"/>
+            </a:endParaRPr>
+          </a:p>
+          <a:p>
+            <a:r>
+              <a:rPr lang="en-US" sz="1200" dirty="0">
+                <a:latin typeface="Calibri" panose="020F0502020204030204" pitchFamily="34" charset="0"/>
+                <a:cs typeface="Calibri" panose="020F0502020204030204" pitchFamily="34" charset="0"/>
+              </a:rPr>
+              <a:t>Phase 1, we are deliberately choosing a deterministic framework over a statistical one for three strategic reasons:</a:t>
+            </a:r>
+          </a:p>
+          <a:p>
+            <a:pPr marL="171450" indent="-171450">
+              <a:buFont typeface="Arial" panose="020B0604020202020204" pitchFamily="34" charset="0"/>
+              <a:buChar char="•"/>
+            </a:pPr>
+            <a:r>
+              <a:rPr lang="en-US" sz="1200" dirty="0">
+                <a:latin typeface="Calibri" panose="020F0502020204030204" pitchFamily="34" charset="0"/>
+                <a:cs typeface="Calibri" panose="020F0502020204030204" pitchFamily="34" charset="0"/>
+              </a:rPr>
+              <a:t>Metrics Drive Field Behavior - Deploy first, sustain second, resolve tickets third, grow fourth.</a:t>
+            </a:r>
+          </a:p>
+          <a:p>
+            <a:pPr marL="171450" indent="-171450">
+              <a:buFont typeface="Arial" panose="020B0604020202020204" pitchFamily="34" charset="0"/>
+              <a:buChar char="•"/>
+            </a:pPr>
+            <a:r>
+              <a:rPr lang="en-US" sz="1200" dirty="0">
+                <a:latin typeface="Calibri" panose="020F0502020204030204" pitchFamily="34" charset="0"/>
+                <a:cs typeface="Calibri" panose="020F0502020204030204" pitchFamily="34" charset="0"/>
+              </a:rPr>
+              <a:t>Avoiding Legacy Data Over-fitting - Training an ML model on bad historical data simply automates past blind spots.</a:t>
+            </a:r>
+          </a:p>
+          <a:p>
+            <a:pPr marL="171450" indent="-171450">
+              <a:buFont typeface="Arial" panose="020B0604020202020204" pitchFamily="34" charset="0"/>
+              <a:buChar char="•"/>
+            </a:pPr>
+            <a:r>
+              <a:rPr lang="en-US" sz="1200" dirty="0">
+                <a:latin typeface="Calibri" panose="020F0502020204030204" pitchFamily="34" charset="0"/>
+                <a:cs typeface="Calibri" panose="020F0502020204030204" pitchFamily="34" charset="0"/>
+              </a:rPr>
+              <a:t>Weights are the Dial – which can and will be changed with learnings and modeling </a:t>
+            </a:r>
+          </a:p>
+          <a:p>
+            <a:endParaRPr lang="en-US" sz="1200" dirty="0">
+              <a:latin typeface="Calibri" panose="020F0502020204030204" pitchFamily="34" charset="0"/>
+              <a:cs typeface="Calibri" panose="020F0502020204030204" pitchFamily="34" charset="0"/>
+            </a:endParaRPr>
+          </a:p>
+          <a:p>
+            <a:r>
+              <a:rPr lang="en-US" sz="1200" dirty="0">
+                <a:latin typeface="Calibri" panose="020F0502020204030204" pitchFamily="34" charset="0"/>
+                <a:cs typeface="Calibri" panose="020F0502020204030204" pitchFamily="34" charset="0"/>
+              </a:rPr>
+              <a:t>Phase 1 is about validating the </a:t>
+            </a:r>
+            <a:r>
+              <a:rPr lang="en-US" sz="1200" i="1" dirty="0">
+                <a:latin typeface="Calibri" panose="020F0502020204030204" pitchFamily="34" charset="0"/>
+                <a:cs typeface="Calibri" panose="020F0502020204030204" pitchFamily="34" charset="0"/>
+              </a:rPr>
+              <a:t>pipeline and the components</a:t>
+            </a:r>
+            <a:r>
+              <a:rPr lang="en-US" sz="1200" dirty="0">
+                <a:latin typeface="Calibri" panose="020F0502020204030204" pitchFamily="34" charset="0"/>
+                <a:cs typeface="Calibri" panose="020F0502020204030204" pitchFamily="34" charset="0"/>
+              </a:rPr>
+              <a:t>. Once the data contract is stable, </a:t>
+            </a:r>
+          </a:p>
+          <a:p>
+            <a:r>
+              <a:rPr lang="en-US" sz="1200" dirty="0">
+                <a:latin typeface="Calibri" panose="020F0502020204030204" pitchFamily="34" charset="0"/>
+                <a:cs typeface="Calibri" panose="020F0502020204030204" pitchFamily="34" charset="0"/>
+              </a:rPr>
+              <a:t>Phase 2 is exactly where we use empirical renewal and churn data to back-test, calibrate, and fine-tune these weights. We start deterministic to drive cultural alignment, and we evolve to statistical to optimize precision.</a:t>
+            </a:r>
+          </a:p>
+          <a:p>
+            <a:endParaRPr lang="en-US" sz="1200" dirty="0">
+              <a:latin typeface="Calibri" panose="020F0502020204030204" pitchFamily="34" charset="0"/>
+              <a:cs typeface="Calibri" panose="020F0502020204030204" pitchFamily="34" charset="0"/>
+            </a:endParaRPr>
+          </a:p>
+          <a:p>
+            <a:r>
+              <a:rPr lang="en-US" sz="1200" b="1" dirty="0">
+                <a:latin typeface="Calibri" panose="020F0502020204030204" pitchFamily="34" charset="0"/>
+                <a:cs typeface="Calibri" panose="020F0502020204030204" pitchFamily="34" charset="0"/>
+              </a:rPr>
+              <a:t>Trade-off is Operational Governance vs. Statistical Over-fitting</a:t>
+            </a:r>
+          </a:p>
+          <a:p>
+            <a:pPr marL="171450" indent="-171450">
+              <a:buFont typeface="Arial" panose="020B0604020202020204" pitchFamily="34" charset="0"/>
+              <a:buChar char="•"/>
+            </a:pPr>
+            <a:r>
+              <a:rPr lang="en-US" sz="1200" dirty="0">
+                <a:latin typeface="Calibri" panose="020F0502020204030204" pitchFamily="34" charset="0"/>
+                <a:cs typeface="Calibri" panose="020F0502020204030204" pitchFamily="34" charset="0"/>
+              </a:rPr>
+              <a:t>The "Napkin Test" for Field Trust: To drive cultural change across Sales, CS, and Support, the metric must be transparent and legible. If scores fluctuate due to black-box algorithmic shifts, the field loses trust and abandons the playbook.</a:t>
+            </a:r>
+          </a:p>
+          <a:p>
+            <a:pPr marL="171450" indent="-171450">
+              <a:buFont typeface="Arial" panose="020B0604020202020204" pitchFamily="34" charset="0"/>
+              <a:buChar char="•"/>
+            </a:pPr>
+            <a:r>
+              <a:rPr lang="en-US" sz="1200" dirty="0">
+                <a:latin typeface="Calibri" panose="020F0502020204030204" pitchFamily="34" charset="0"/>
+                <a:cs typeface="Calibri" panose="020F0502020204030204" pitchFamily="34" charset="0"/>
+              </a:rPr>
+              <a:t>The Legacy Data Trap: Training a Machine Learning model on historical Palo Alto Networks data would over-fit the algorithm to legacy, non-consumption-based renewal behaviors, institutionalizing past blind spots.</a:t>
+            </a:r>
+          </a:p>
+          <a:p>
+            <a:endParaRPr lang="en-US" sz="1200" dirty="0">
+              <a:latin typeface="Calibri" panose="020F0502020204030204" pitchFamily="34" charset="0"/>
+              <a:cs typeface="Calibri" panose="020F0502020204030204" pitchFamily="34" charset="0"/>
+            </a:endParaRPr>
+          </a:p>
+        </p:txBody>
+      </p:sp>
+    </p:spTree>
+    <p:extLst>
+      <p:ext uri="{BB962C8B-B14F-4D97-AF65-F5344CB8AC3E}">
+        <p14:creationId xmlns:p14="http://schemas.microsoft.com/office/powerpoint/2010/main" val="701971280"/>
+      </p:ext>
+    </p:extLst>
   </p:cSld>
   <p:clrMapOvr>
     <a:masterClrMapping/>
@@ -4513,9 +6407,6 @@
           <a:bodyPr wrap="square" rtlCol="0" anchor="ctr"/>
           <a:lstStyle/>
           <a:p>
-            <a:pPr marL="0" indent="0">
-              <a:buNone/>
-            </a:pPr>
             <a:r>
               <a:rPr lang="en-US" sz="1300" i="1" dirty="0">
                 <a:solidFill>
@@ -4525,7 +6416,29 @@
                 <a:ea typeface="Calibri" pitchFamily="34" charset="-122"/>
                 <a:cs typeface="Calibri" pitchFamily="34" charset="-120"/>
               </a:rPr>
-              <a:t>Principal PM · 7+ years building post-sales data products at Microsoft Azure</a:t>
+              <a:t>Engineer </a:t>
+            </a:r>
+            <a:r>
+              <a:rPr lang="en-US" sz="1400" dirty="0">
+                <a:solidFill>
+                  <a:srgbClr val="E8F4F8"/>
+                </a:solidFill>
+                <a:latin typeface="Calibri" pitchFamily="34" charset="0"/>
+                <a:ea typeface="Calibri" pitchFamily="34" charset="-122"/>
+                <a:cs typeface="Calibri" pitchFamily="34" charset="-120"/>
+              </a:rPr>
+              <a:t>→ </a:t>
+            </a:r>
+            <a:r>
+              <a:rPr lang="en-US" sz="1300" i="1" dirty="0">
+                <a:solidFill>
+                  <a:srgbClr val="00C9B1"/>
+                </a:solidFill>
+                <a:latin typeface="Calibri" pitchFamily="34" charset="0"/>
+                <a:ea typeface="Calibri" pitchFamily="34" charset="-122"/>
+                <a:cs typeface="Calibri" pitchFamily="34" charset="-120"/>
+              </a:rPr>
+              <a:t>Principal PM · 7+ years building post-sales data products at Microsoft Azure  · 15+ years in Enterprise IT </a:t>
             </a:r>
             <a:endParaRPr lang="en-US" sz="1300" dirty="0"/>
           </a:p>
@@ -5152,12 +7065,121 @@
                   <a:srgbClr val="FFFFFF"/>
                 </a:solidFill>
                 <a:latin typeface="Calibri" pitchFamily="34" charset="0"/>
-                <a:ea typeface="Calibri" pitchFamily="34" charset="-122"/>
-                <a:cs typeface="Calibri" pitchFamily="34" charset="-120"/>
-              </a:rPr>
-              <a:t>"A team should not write a single line of code until the business and technical contracts are completely verified. BRD first. Markdown spec second. AI execution engine third."</a:t>
+                <a:cs typeface="Calibri" pitchFamily="34" charset="-120"/>
+              </a:rPr>
+              <a:t>Start Small, Iterate Fast, Scale Reliably.</a:t>
             </a:r>
             <a:endParaRPr lang="en-US" sz="1150" dirty="0"/>
+          </a:p>
+        </p:txBody>
+      </p:sp>
+      <p:sp>
+        <p:nvSpPr>
+          <p:cNvPr id="18" name="Text 17">
+            <a:extLst>
+              <a:ext uri="{FF2B5EF4-FFF2-40B4-BE49-F238E27FC236}">
+                <a16:creationId xmlns:a16="http://schemas.microsoft.com/office/drawing/2014/main" id="{80179639-8B44-6384-61A3-387F5D55160C}"/>
+              </a:ext>
+            </a:extLst>
+          </p:cNvPr>
+          <p:cNvSpPr/>
+          <p:nvPr/>
+        </p:nvSpPr>
+        <p:spPr>
+          <a:xfrm>
+            <a:off x="4872111" y="403665"/>
+            <a:ext cx="3951849" cy="274320"/>
+          </a:xfrm>
+          <a:prstGeom prst="rect">
+            <a:avLst/>
+          </a:prstGeom>
+          <a:noFill/>
+          <a:ln/>
+        </p:spPr>
+        <p:txBody>
+          <a:bodyPr wrap="square" rtlCol="0" anchor="ctr"/>
+          <a:lstStyle/>
+          <a:p>
+            <a:pPr marL="0" indent="0" algn="l">
+              <a:buNone/>
+            </a:pPr>
+            <a:r>
+              <a:rPr lang="en-US" sz="1000" dirty="0">
+                <a:solidFill>
+                  <a:srgbClr val="8FB3CC"/>
+                </a:solidFill>
+                <a:latin typeface="Calibri" pitchFamily="34" charset="0"/>
+                <a:ea typeface="Calibri" pitchFamily="34" charset="-122"/>
+                <a:cs typeface="Calibri" pitchFamily="34" charset="-120"/>
+              </a:rPr>
+              <a:t>Dharmesh Bhagat  ·  Principal PM, Data &amp; AI Analytics  ·  GCS Case Study</a:t>
+            </a:r>
+            <a:endParaRPr lang="en-US" sz="1000" dirty="0"/>
+          </a:p>
+        </p:txBody>
+      </p:sp>
+      <p:sp>
+        <p:nvSpPr>
+          <p:cNvPr id="19" name="Text 17">
+            <a:extLst>
+              <a:ext uri="{FF2B5EF4-FFF2-40B4-BE49-F238E27FC236}">
+                <a16:creationId xmlns:a16="http://schemas.microsoft.com/office/drawing/2014/main" id="{6A4A3B15-BC5E-1E19-2869-5CE3619794F8}"/>
+              </a:ext>
+            </a:extLst>
+          </p:cNvPr>
+          <p:cNvSpPr/>
+          <p:nvPr/>
+        </p:nvSpPr>
+        <p:spPr>
+          <a:xfrm>
+            <a:off x="502920" y="4654296"/>
+            <a:ext cx="8138160" cy="274320"/>
+          </a:xfrm>
+          <a:prstGeom prst="rect">
+            <a:avLst/>
+          </a:prstGeom>
+          <a:noFill/>
+          <a:ln/>
+        </p:spPr>
+        <p:txBody>
+          <a:bodyPr wrap="square" rtlCol="0" anchor="ctr"/>
+          <a:lstStyle/>
+          <a:p>
+            <a:pPr algn="ctr"/>
+            <a:r>
+              <a:rPr lang="en-US" sz="1500" dirty="0">
+                <a:solidFill>
+                  <a:srgbClr val="8FB3CC"/>
+                </a:solidFill>
+                <a:latin typeface="Calibri" pitchFamily="34" charset="0"/>
+                <a:ea typeface="Calibri" pitchFamily="34" charset="-122"/>
+                <a:cs typeface="Calibri" pitchFamily="34" charset="-120"/>
+              </a:rPr>
+              <a:t>SAP ·  RLI · Apple Inc · SanDisk · KLA-Tencor · Microsoft · </a:t>
+            </a:r>
+            <a:r>
+              <a:rPr lang="en-US" sz="1500" dirty="0" err="1">
+                <a:solidFill>
+                  <a:srgbClr val="8FB3CC"/>
+                </a:solidFill>
+                <a:latin typeface="Calibri" pitchFamily="34" charset="0"/>
+                <a:ea typeface="Calibri" pitchFamily="34" charset="-122"/>
+                <a:cs typeface="Calibri" pitchFamily="34" charset="-120"/>
+              </a:rPr>
+              <a:t>Axari</a:t>
+            </a:r>
+            <a:r>
+              <a:rPr lang="en-US" sz="1500" dirty="0">
+                <a:solidFill>
+                  <a:srgbClr val="8FB3CC"/>
+                </a:solidFill>
+                <a:latin typeface="Calibri" pitchFamily="34" charset="0"/>
+                <a:ea typeface="Calibri" pitchFamily="34" charset="-122"/>
+                <a:cs typeface="Calibri" pitchFamily="34" charset="-120"/>
+              </a:rPr>
+              <a:t>  </a:t>
+            </a:r>
+            <a:endParaRPr lang="en-US" sz="1500" dirty="0"/>
           </a:p>
         </p:txBody>
       </p:sp>
@@ -6691,7 +8713,7 @@
         <p:spPr>
           <a:xfrm>
             <a:off x="7095744" y="2029968"/>
-            <a:ext cx="2066544" cy="2606040"/>
+            <a:ext cx="1883664" cy="2606040"/>
           </a:xfrm>
           <a:prstGeom prst="roundRect">
             <a:avLst>
@@ -9642,13 +11664,13 @@
             </a:avLst>
           </a:prstGeom>
           <a:solidFill>
-            <a:srgbClr val="E6F7F2"/>
+            <a:srgbClr val="152642"/>
           </a:solidFill>
           <a:ln/>
           <a:effectLst>
-            <a:outerShdw blurRad="38100" dist="12700" dir="2700000" algn="bl" rotWithShape="0">
+            <a:outerShdw blurRad="101600" dist="38100" dir="2700000" algn="bl" rotWithShape="0">
               <a:srgbClr val="000000">
-                <a:alpha val="8000"/>
+                <a:alpha val="20000"/>
               </a:srgbClr>
             </a:outerShdw>
           </a:effectLst>
@@ -9732,7 +11754,7 @@
             <a:r>
               <a:rPr lang="en-US" sz="900" dirty="0">
                 <a:solidFill>
-                  <a:srgbClr val="555555"/>
+                  <a:schemeClr val="bg1"/>
                 </a:solidFill>
                 <a:latin typeface="Calibri" pitchFamily="34" charset="0"/>
                 <a:ea typeface="Calibri" pitchFamily="34" charset="-122"/>
@@ -9740,7 +11762,11 @@
               </a:rPr>
               <a:t>~55% of accounts</a:t>
             </a:r>
-            <a:endParaRPr lang="en-US" sz="900" dirty="0"/>
+            <a:endParaRPr lang="en-US" sz="900" dirty="0">
+              <a:solidFill>
+                <a:schemeClr val="bg1"/>
+              </a:solidFill>
+            </a:endParaRPr>
           </a:p>
         </p:txBody>
       </p:sp>
@@ -9780,7 +11806,7 @@
             <a:r>
               <a:rPr lang="en-US" sz="900" dirty="0">
                 <a:solidFill>
-                  <a:srgbClr val="333333"/>
+                  <a:schemeClr val="bg1"/>
                 </a:solidFill>
                 <a:latin typeface="Calibri" pitchFamily="34" charset="0"/>
                 <a:ea typeface="Calibri" pitchFamily="34" charset="-122"/>
@@ -9788,7 +11814,11 @@
               </a:rPr>
               <a:t>QBR maintenance + expansion play</a:t>
             </a:r>
-            <a:endParaRPr lang="en-US" sz="900" dirty="0"/>
+            <a:endParaRPr lang="en-US" sz="900" dirty="0">
+              <a:solidFill>
+                <a:schemeClr val="bg1"/>
+              </a:solidFill>
+            </a:endParaRPr>
           </a:p>
         </p:txBody>
       </p:sp>
@@ -9815,13 +11845,13 @@
             </a:avLst>
           </a:prstGeom>
           <a:solidFill>
-            <a:srgbClr val="FFF8E6"/>
+            <a:srgbClr val="152642"/>
           </a:solidFill>
           <a:ln/>
           <a:effectLst>
-            <a:outerShdw blurRad="38100" dist="12700" dir="2700000" algn="bl" rotWithShape="0">
+            <a:outerShdw blurRad="101600" dist="38100" dir="2700000" algn="bl" rotWithShape="0">
               <a:srgbClr val="000000">
-                <a:alpha val="8000"/>
+                <a:alpha val="20000"/>
               </a:srgbClr>
             </a:outerShdw>
           </a:effectLst>
@@ -9905,7 +11935,7 @@
             <a:r>
               <a:rPr lang="en-US" sz="900" dirty="0">
                 <a:solidFill>
-                  <a:srgbClr val="555555"/>
+                  <a:schemeClr val="bg1"/>
                 </a:solidFill>
                 <a:latin typeface="Calibri" pitchFamily="34" charset="0"/>
                 <a:ea typeface="Calibri" pitchFamily="34" charset="-122"/>
@@ -9913,7 +11943,11 @@
               </a:rPr>
               <a:t>~20% of accounts</a:t>
             </a:r>
-            <a:endParaRPr lang="en-US" sz="900" dirty="0"/>
+            <a:endParaRPr lang="en-US" sz="900" dirty="0">
+              <a:solidFill>
+                <a:schemeClr val="bg1"/>
+              </a:solidFill>
+            </a:endParaRPr>
           </a:p>
         </p:txBody>
       </p:sp>
@@ -9953,7 +11987,7 @@
             <a:r>
               <a:rPr lang="en-US" sz="900" dirty="0">
                 <a:solidFill>
-                  <a:srgbClr val="333333"/>
+                  <a:schemeClr val="bg1"/>
                 </a:solidFill>
                 <a:latin typeface="Calibri" pitchFamily="34" charset="0"/>
                 <a:ea typeface="Calibri" pitchFamily="34" charset="-122"/>
@@ -9961,7 +11995,11 @@
               </a:rPr>
               <a:t>Proactive outreach, check CBV</a:t>
             </a:r>
-            <a:endParaRPr lang="en-US" sz="900" dirty="0"/>
+            <a:endParaRPr lang="en-US" sz="900" dirty="0">
+              <a:solidFill>
+                <a:schemeClr val="bg1"/>
+              </a:solidFill>
+            </a:endParaRPr>
           </a:p>
         </p:txBody>
       </p:sp>
@@ -9988,13 +12026,13 @@
             </a:avLst>
           </a:prstGeom>
           <a:solidFill>
-            <a:srgbClr val="FFF0E6"/>
+            <a:srgbClr val="152642"/>
           </a:solidFill>
           <a:ln/>
           <a:effectLst>
-            <a:outerShdw blurRad="38100" dist="12700" dir="2700000" algn="bl" rotWithShape="0">
+            <a:outerShdw blurRad="101600" dist="38100" dir="2700000" algn="bl" rotWithShape="0">
               <a:srgbClr val="000000">
-                <a:alpha val="8000"/>
+                <a:alpha val="20000"/>
               </a:srgbClr>
             </a:outerShdw>
           </a:effectLst>
@@ -10078,7 +12116,7 @@
             <a:r>
               <a:rPr lang="en-US" sz="900" dirty="0">
                 <a:solidFill>
-                  <a:srgbClr val="555555"/>
+                  <a:schemeClr val="bg1"/>
                 </a:solidFill>
                 <a:latin typeface="Calibri" pitchFamily="34" charset="0"/>
                 <a:ea typeface="Calibri" pitchFamily="34" charset="-122"/>
@@ -10086,7 +12124,11 @@
               </a:rPr>
               <a:t>~15% of accounts</a:t>
             </a:r>
-            <a:endParaRPr lang="en-US" sz="900" dirty="0"/>
+            <a:endParaRPr lang="en-US" sz="900" dirty="0">
+              <a:solidFill>
+                <a:schemeClr val="bg1"/>
+              </a:solidFill>
+            </a:endParaRPr>
           </a:p>
         </p:txBody>
       </p:sp>
@@ -10126,7 +12168,7 @@
             <a:r>
               <a:rPr lang="en-US" sz="900" dirty="0">
                 <a:solidFill>
-                  <a:srgbClr val="333333"/>
+                  <a:schemeClr val="bg1"/>
                 </a:solidFill>
                 <a:latin typeface="Calibri" pitchFamily="34" charset="0"/>
                 <a:ea typeface="Calibri" pitchFamily="34" charset="-122"/>
@@ -10134,7 +12176,11 @@
               </a:rPr>
               <a:t>CSM intervention + PS support</a:t>
             </a:r>
-            <a:endParaRPr lang="en-US" sz="900" dirty="0"/>
+            <a:endParaRPr lang="en-US" sz="900" dirty="0">
+              <a:solidFill>
+                <a:schemeClr val="bg1"/>
+              </a:solidFill>
+            </a:endParaRPr>
           </a:p>
         </p:txBody>
       </p:sp>
@@ -10161,13 +12207,13 @@
             </a:avLst>
           </a:prstGeom>
           <a:solidFill>
-            <a:srgbClr val="F9E6E6"/>
+            <a:srgbClr val="152642"/>
           </a:solidFill>
           <a:ln/>
           <a:effectLst>
-            <a:outerShdw blurRad="38100" dist="12700" dir="2700000" algn="bl" rotWithShape="0">
+            <a:outerShdw blurRad="101600" dist="38100" dir="2700000" algn="bl" rotWithShape="0">
               <a:srgbClr val="000000">
-                <a:alpha val="8000"/>
+                <a:alpha val="20000"/>
               </a:srgbClr>
             </a:outerShdw>
           </a:effectLst>
@@ -10251,7 +12297,7 @@
             <a:r>
               <a:rPr lang="en-US" sz="900" dirty="0">
                 <a:solidFill>
-                  <a:srgbClr val="555555"/>
+                  <a:schemeClr val="bg1"/>
                 </a:solidFill>
                 <a:latin typeface="Calibri" pitchFamily="34" charset="0"/>
                 <a:ea typeface="Calibri" pitchFamily="34" charset="-122"/>
@@ -10259,7 +12305,11 @@
               </a:rPr>
               <a:t>~10% of accounts</a:t>
             </a:r>
-            <a:endParaRPr lang="en-US" sz="900" dirty="0"/>
+            <a:endParaRPr lang="en-US" sz="900" dirty="0">
+              <a:solidFill>
+                <a:schemeClr val="bg1"/>
+              </a:solidFill>
+            </a:endParaRPr>
           </a:p>
         </p:txBody>
       </p:sp>
@@ -10299,7 +12349,7 @@
             <a:r>
               <a:rPr lang="en-US" sz="900" dirty="0">
                 <a:solidFill>
-                  <a:srgbClr val="333333"/>
+                  <a:schemeClr val="bg1"/>
                 </a:solidFill>
                 <a:latin typeface="Calibri" pitchFamily="34" charset="0"/>
                 <a:ea typeface="Calibri" pitchFamily="34" charset="-122"/>
@@ -10307,7 +12357,11 @@
               </a:rPr>
               <a:t>Executive escalation + sprint</a:t>
             </a:r>
-            <a:endParaRPr lang="en-US" sz="900" dirty="0"/>
+            <a:endParaRPr lang="en-US" sz="900" dirty="0">
+              <a:solidFill>
+                <a:schemeClr val="bg1"/>
+              </a:solidFill>
+            </a:endParaRPr>
           </a:p>
         </p:txBody>
       </p:sp>
@@ -11716,7 +13770,7 @@
         </p:nvSpPr>
         <p:spPr>
           <a:xfrm>
-            <a:off x="623092" y="3011296"/>
+            <a:off x="661392" y="2591498"/>
             <a:ext cx="1931729" cy="440564"/>
           </a:xfrm>
           <a:prstGeom prst="roundRect">
